--- a/assets/figures-editable/c1-c2/c1-e31.pptx
+++ b/assets/figures-editable/c1-c2/c1-e31.pptx
@@ -7,7 +7,7 @@
   <p:sldIdLst>
     <p:sldId id="256" r:id="rId7"/>
   </p:sldIdLst>
-  <p:sldSz cx="11948160" cy="8095488" type="screen4x3"/>
+  <p:sldSz cx="12191695" cy="6858000" type="screen4x3"/>
   <p:notesSz cx="6858000" cy="9144000"/>
   <p:defaultTextStyle>
     <a:defPPr>
@@ -3098,14 +3098,14 @@
       <p:grpSpPr/>
       <p:sp>
         <p:nvSpPr>
-          <p:cNvPr id="2" name="text1" descr="sci-ppt:C1-E31-001"/>
+          <p:cNvPr id="2" name="C1-E31 text 0" descr="sci-ppt:o000"/>
           <p:cNvSpPr txBox="1"/>
           <p:nvPr/>
         </p:nvSpPr>
         <p:spPr>
           <a:xfrm>
-            <a:off x="316992" y="268224"/>
-            <a:ext cx="11277600" cy="359054"/>
+            <a:off x="274320" y="118872"/>
+            <a:ext cx="11612880" cy="340105"/>
           </a:xfrm>
           <a:prstGeom prst="rect">
             <a:avLst/>
@@ -3114,7 +3114,7 @@
           <a:effectLst/>
         </p:spPr>
         <p:txBody>
-          <a:bodyPr wrap="none" lIns="27432" rIns="27432" tIns="18288" bIns="18288" anchor="ctr">
+          <a:bodyPr wrap="none" lIns="18288" rIns="18288" tIns="18288" bIns="18288" anchor="t">
             <a:spAutoFit/>
           </a:bodyPr>
           <a:lstStyle/>
@@ -3125,34 +3125,851 @@
               </a:spcAft>
             </a:pPr>
             <a:r>
-              <a:rPr sz="1823" b="0" i="0">
+              <a:rPr sz="1900" b="1" i="0">
                 <a:solidFill>
                   <a:srgbClr val="8EDBD4"/>
                 </a:solidFill>
                 <a:latin typeface="Arial"/>
               </a:rPr>
-              <a:t>C1-E31 | Physical-variable diagram</a:t>
-            </a:r>
-          </a:p>
-        </p:txBody>
-      </p:sp>
-      <p:sp>
-        <p:nvSpPr>
-          <p:cNvPr id="3" name="rect2" descr="sci-ppt:C1-E31-002"/>
+              <a:t>C1-E31 · Compressibility applicability diagnostics</a:t>
+            </a:r>
+          </a:p>
+        </p:txBody>
+      </p:sp>
+      <p:sp>
+        <p:nvSpPr>
+          <p:cNvPr id="3" name="C1-E31 text 1" descr="sci-ppt:o001"/>
+          <p:cNvSpPr txBox="1"/>
+          <p:nvPr/>
+        </p:nvSpPr>
+        <p:spPr>
+          <a:xfrm>
+            <a:off x="457200" y="914400"/>
+            <a:ext cx="5669280" cy="262636"/>
+          </a:xfrm>
+          <a:prstGeom prst="rect">
+            <a:avLst/>
+          </a:prstGeom>
+          <a:noFill/>
+          <a:effectLst/>
+        </p:spPr>
+        <p:txBody>
+          <a:bodyPr wrap="none" lIns="18288" rIns="18288" tIns="18288" bIns="18288" anchor="t">
+            <a:spAutoFit/>
+          </a:bodyPr>
+          <a:lstStyle/>
+          <a:p>
+            <a:pPr algn="l">
+              <a:spcAft>
+                <a:spcPts val="0"/>
+              </a:spcAft>
+            </a:pPr>
+            <a:r>
+              <a:rPr sz="1400" b="1" i="0">
+                <a:solidFill>
+                  <a:srgbClr val="8EDBD4"/>
+                </a:solidFill>
+                <a:latin typeface="Arial"/>
+              </a:rPr>
+              <a:t>A pressure pulse crossing a distance Lₑ</a:t>
+            </a:r>
+          </a:p>
+        </p:txBody>
+      </p:sp>
+      <p:sp>
+        <p:nvSpPr>
+          <p:cNvPr id="4" name="C1-E31 rect 2" descr="sci-ppt:o002"/>
           <p:cNvSpPr/>
           <p:nvPr/>
         </p:nvSpPr>
         <p:spPr>
           <a:xfrm>
-            <a:off x="1219200" y="1828800"/>
-            <a:ext cx="3657600" cy="1158240"/>
+            <a:off x="548640" y="2194560"/>
+            <a:ext cx="5120640" cy="502920"/>
           </a:xfrm>
           <a:prstGeom prst="rect">
             <a:avLst/>
           </a:prstGeom>
           <a:solidFill>
-            <a:srgbClr val="213E4B"/>
+            <a:srgbClr val="1E4A5A"/>
           </a:solidFill>
+          <a:ln w="15240">
+            <a:solidFill>
+              <a:srgbClr val="2B6678"/>
+            </a:solidFill>
+          </a:ln>
+          <a:effectLst/>
+        </p:spPr>
+        <p:txBody>
+          <a:bodyPr rtlCol="0" anchor="ctr"/>
+          <a:lstStyle/>
+          <a:p>
+            <a:pPr algn="ctr"/>
+          </a:p>
+        </p:txBody>
+      </p:sp>
+      <p:sp>
+        <p:nvSpPr>
+          <p:cNvPr id="5" name="C1-E31 text 3" descr="sci-ppt:o003"/>
+          <p:cNvSpPr txBox="1"/>
+          <p:nvPr/>
+        </p:nvSpPr>
+        <p:spPr>
+          <a:xfrm>
+            <a:off x="548640" y="1417319"/>
+            <a:ext cx="5120640" cy="239395"/>
+          </a:xfrm>
+          <a:prstGeom prst="rect">
+            <a:avLst/>
+          </a:prstGeom>
+          <a:noFill/>
+          <a:effectLst/>
+        </p:spPr>
+        <p:txBody>
+          <a:bodyPr wrap="none" lIns="18288" rIns="18288" tIns="18288" bIns="18288" anchor="t">
+            <a:spAutoFit/>
+          </a:bodyPr>
+          <a:lstStyle/>
+          <a:p>
+            <a:pPr algn="l">
+              <a:spcAft>
+                <a:spcPts val="0"/>
+              </a:spcAft>
+            </a:pPr>
+            <a:r>
+              <a:rPr sz="1250" b="1" i="0">
+                <a:solidFill>
+                  <a:srgbClr val="8EDBD4"/>
+                </a:solidFill>
+                <a:latin typeface="Arial"/>
+              </a:rPr>
+              <a:t>slow rise: τₑ ≫ Lₑ/c</a:t>
+            </a:r>
+          </a:p>
+        </p:txBody>
+      </p:sp>
+      <p:sp>
+        <p:nvSpPr>
+          <p:cNvPr id="6" name="C1-E31 polygon 4" descr="sci-ppt:o004"/>
+          <p:cNvSpPr/>
+          <p:nvPr/>
+        </p:nvSpPr>
+        <p:spPr>
+          <a:xfrm>
+            <a:off x="548640" y="2087051"/>
+            <a:ext cx="5120640" cy="419841"/>
+          </a:xfrm>
+          <a:custGeom>
+            <a:avLst/>
+            <a:gdLst/>
+            <a:ahLst/>
+            <a:cxnLst/>
+            <a:rect l="l" t="t" r="r" b="b"/>
+            <a:pathLst>
+              <a:path w="5120640" h="419841">
+                <a:moveTo>
+                  <a:pt x="0" y="0"/>
+                </a:moveTo>
+                <a:lnTo>
+                  <a:pt x="64818" y="4051"/>
+                </a:lnTo>
+                <a:lnTo>
+                  <a:pt x="129636" y="8172"/>
+                </a:lnTo>
+                <a:lnTo>
+                  <a:pt x="194454" y="12363"/>
+                </a:lnTo>
+                <a:lnTo>
+                  <a:pt x="259272" y="16624"/>
+                </a:lnTo>
+                <a:lnTo>
+                  <a:pt x="324091" y="20955"/>
+                </a:lnTo>
+                <a:lnTo>
+                  <a:pt x="388909" y="25355"/>
+                </a:lnTo>
+                <a:lnTo>
+                  <a:pt x="453727" y="29823"/>
+                </a:lnTo>
+                <a:lnTo>
+                  <a:pt x="518545" y="34360"/>
+                </a:lnTo>
+                <a:lnTo>
+                  <a:pt x="583364" y="38964"/>
+                </a:lnTo>
+                <a:lnTo>
+                  <a:pt x="648182" y="43635"/>
+                </a:lnTo>
+                <a:lnTo>
+                  <a:pt x="713000" y="48372"/>
+                </a:lnTo>
+                <a:lnTo>
+                  <a:pt x="777818" y="53175"/>
+                </a:lnTo>
+                <a:lnTo>
+                  <a:pt x="842636" y="58041"/>
+                </a:lnTo>
+                <a:lnTo>
+                  <a:pt x="907455" y="62971"/>
+                </a:lnTo>
+                <a:lnTo>
+                  <a:pt x="972273" y="67964"/>
+                </a:lnTo>
+                <a:lnTo>
+                  <a:pt x="1037091" y="73017"/>
+                </a:lnTo>
+                <a:lnTo>
+                  <a:pt x="1101909" y="78129"/>
+                </a:lnTo>
+                <a:lnTo>
+                  <a:pt x="1166728" y="83300"/>
+                </a:lnTo>
+                <a:lnTo>
+                  <a:pt x="1231546" y="88528"/>
+                </a:lnTo>
+                <a:lnTo>
+                  <a:pt x="1296364" y="93811"/>
+                </a:lnTo>
+                <a:lnTo>
+                  <a:pt x="1361182" y="99148"/>
+                </a:lnTo>
+                <a:lnTo>
+                  <a:pt x="1426001" y="104536"/>
+                </a:lnTo>
+                <a:lnTo>
+                  <a:pt x="1490819" y="109975"/>
+                </a:lnTo>
+                <a:lnTo>
+                  <a:pt x="1555637" y="115462"/>
+                </a:lnTo>
+                <a:lnTo>
+                  <a:pt x="1620455" y="120995"/>
+                </a:lnTo>
+                <a:lnTo>
+                  <a:pt x="1685273" y="126572"/>
+                </a:lnTo>
+                <a:lnTo>
+                  <a:pt x="1750092" y="132191"/>
+                </a:lnTo>
+                <a:lnTo>
+                  <a:pt x="1814910" y="137850"/>
+                </a:lnTo>
+                <a:lnTo>
+                  <a:pt x="1879728" y="143547"/>
+                </a:lnTo>
+                <a:lnTo>
+                  <a:pt x="1944546" y="149279"/>
+                </a:lnTo>
+                <a:lnTo>
+                  <a:pt x="2009365" y="155044"/>
+                </a:lnTo>
+                <a:lnTo>
+                  <a:pt x="2074183" y="160839"/>
+                </a:lnTo>
+                <a:lnTo>
+                  <a:pt x="2139001" y="166662"/>
+                </a:lnTo>
+                <a:lnTo>
+                  <a:pt x="2203819" y="172511"/>
+                </a:lnTo>
+                <a:lnTo>
+                  <a:pt x="2268637" y="178382"/>
+                </a:lnTo>
+                <a:lnTo>
+                  <a:pt x="2333456" y="184274"/>
+                </a:lnTo>
+                <a:lnTo>
+                  <a:pt x="2398274" y="190183"/>
+                </a:lnTo>
+                <a:lnTo>
+                  <a:pt x="2463092" y="196106"/>
+                </a:lnTo>
+                <a:lnTo>
+                  <a:pt x="2527910" y="202042"/>
+                </a:lnTo>
+                <a:lnTo>
+                  <a:pt x="2592729" y="207987"/>
+                </a:lnTo>
+                <a:lnTo>
+                  <a:pt x="2657547" y="213939"/>
+                </a:lnTo>
+                <a:lnTo>
+                  <a:pt x="2722365" y="219894"/>
+                </a:lnTo>
+                <a:lnTo>
+                  <a:pt x="2787183" y="225850"/>
+                </a:lnTo>
+                <a:lnTo>
+                  <a:pt x="2852002" y="231804"/>
+                </a:lnTo>
+                <a:lnTo>
+                  <a:pt x="2916820" y="237754"/>
+                </a:lnTo>
+                <a:lnTo>
+                  <a:pt x="2981638" y="243696"/>
+                </a:lnTo>
+                <a:lnTo>
+                  <a:pt x="3046456" y="249628"/>
+                </a:lnTo>
+                <a:lnTo>
+                  <a:pt x="3111274" y="255546"/>
+                </a:lnTo>
+                <a:lnTo>
+                  <a:pt x="3176093" y="261450"/>
+                </a:lnTo>
+                <a:lnTo>
+                  <a:pt x="3240911" y="267334"/>
+                </a:lnTo>
+                <a:lnTo>
+                  <a:pt x="3305729" y="273198"/>
+                </a:lnTo>
+                <a:lnTo>
+                  <a:pt x="3370547" y="279038"/>
+                </a:lnTo>
+                <a:lnTo>
+                  <a:pt x="3435366" y="284851"/>
+                </a:lnTo>
+                <a:lnTo>
+                  <a:pt x="3500184" y="290636"/>
+                </a:lnTo>
+                <a:lnTo>
+                  <a:pt x="3565002" y="296389"/>
+                </a:lnTo>
+                <a:lnTo>
+                  <a:pt x="3629820" y="302109"/>
+                </a:lnTo>
+                <a:lnTo>
+                  <a:pt x="3694638" y="307792"/>
+                </a:lnTo>
+                <a:lnTo>
+                  <a:pt x="3759457" y="313437"/>
+                </a:lnTo>
+                <a:lnTo>
+                  <a:pt x="3824275" y="319042"/>
+                </a:lnTo>
+                <a:lnTo>
+                  <a:pt x="3889093" y="324603"/>
+                </a:lnTo>
+                <a:lnTo>
+                  <a:pt x="3953911" y="330120"/>
+                </a:lnTo>
+                <a:lnTo>
+                  <a:pt x="4018730" y="335590"/>
+                </a:lnTo>
+                <a:lnTo>
+                  <a:pt x="4083548" y="341011"/>
+                </a:lnTo>
+                <a:lnTo>
+                  <a:pt x="4148366" y="346381"/>
+                </a:lnTo>
+                <a:lnTo>
+                  <a:pt x="4213184" y="351699"/>
+                </a:lnTo>
+                <a:lnTo>
+                  <a:pt x="4278003" y="356962"/>
+                </a:lnTo>
+                <a:lnTo>
+                  <a:pt x="4342821" y="362170"/>
+                </a:lnTo>
+                <a:lnTo>
+                  <a:pt x="4407639" y="367320"/>
+                </a:lnTo>
+                <a:lnTo>
+                  <a:pt x="4472457" y="372412"/>
+                </a:lnTo>
+                <a:lnTo>
+                  <a:pt x="4537275" y="377443"/>
+                </a:lnTo>
+                <a:lnTo>
+                  <a:pt x="4602094" y="382414"/>
+                </a:lnTo>
+                <a:lnTo>
+                  <a:pt x="4666912" y="387321"/>
+                </a:lnTo>
+                <a:lnTo>
+                  <a:pt x="4731730" y="392165"/>
+                </a:lnTo>
+                <a:lnTo>
+                  <a:pt x="4796548" y="396944"/>
+                </a:lnTo>
+                <a:lnTo>
+                  <a:pt x="4861367" y="401658"/>
+                </a:lnTo>
+                <a:lnTo>
+                  <a:pt x="4926185" y="406305"/>
+                </a:lnTo>
+                <a:lnTo>
+                  <a:pt x="4991003" y="410885"/>
+                </a:lnTo>
+                <a:lnTo>
+                  <a:pt x="5055821" y="415397"/>
+                </a:lnTo>
+                <a:lnTo>
+                  <a:pt x="5120640" y="419841"/>
+                </a:lnTo>
+              </a:path>
+            </a:pathLst>
+          </a:custGeom>
+          <a:noFill/>
+          <a:ln w="38100">
+            <a:solidFill>
+              <a:srgbClr val="8EDBD4"/>
+            </a:solidFill>
+          </a:ln>
+          <a:effectLst/>
+        </p:spPr>
+        <p:txBody>
+          <a:bodyPr rtlCol="0" anchor="ctr"/>
+          <a:lstStyle/>
+          <a:p>
+            <a:pPr algn="ctr"/>
+          </a:p>
+        </p:txBody>
+      </p:sp>
+      <p:sp>
+        <p:nvSpPr>
+          <p:cNvPr id="7" name="C1-E31 text 5" descr="sci-ppt:o005"/>
+          <p:cNvSpPr txBox="1"/>
+          <p:nvPr/>
+        </p:nvSpPr>
+        <p:spPr>
+          <a:xfrm>
+            <a:off x="548640" y="2752344"/>
+            <a:ext cx="5120640" cy="208407"/>
+          </a:xfrm>
+          <a:prstGeom prst="rect">
+            <a:avLst/>
+          </a:prstGeom>
+          <a:noFill/>
+          <a:effectLst/>
+        </p:spPr>
+        <p:txBody>
+          <a:bodyPr wrap="none" lIns="18288" rIns="18288" tIns="18288" bIns="18288" anchor="t">
+            <a:spAutoFit/>
+          </a:bodyPr>
+          <a:lstStyle/>
+          <a:p>
+            <a:pPr algn="l">
+              <a:spcAft>
+                <a:spcPts val="0"/>
+              </a:spcAft>
+            </a:pPr>
+            <a:r>
+              <a:rPr sz="1050" b="0" i="0">
+                <a:solidFill>
+                  <a:srgbClr val="B4C7D2"/>
+                </a:solidFill>
+                <a:latin typeface="Arial"/>
+              </a:rPr>
+              <a:t>pressure along the column at one instant</a:t>
+            </a:r>
+          </a:p>
+        </p:txBody>
+      </p:sp>
+      <p:sp>
+        <p:nvSpPr>
+          <p:cNvPr id="8" name="C1-E31 rect 6" descr="sci-ppt:o006"/>
+          <p:cNvSpPr/>
+          <p:nvPr/>
+        </p:nvSpPr>
+        <p:spPr>
+          <a:xfrm>
+            <a:off x="548640" y="4114800"/>
+            <a:ext cx="5120640" cy="502920"/>
+          </a:xfrm>
+          <a:prstGeom prst="rect">
+            <a:avLst/>
+          </a:prstGeom>
+          <a:solidFill>
+            <a:srgbClr val="1E4A5A"/>
+          </a:solidFill>
+          <a:ln w="15240">
+            <a:solidFill>
+              <a:srgbClr val="2B6678"/>
+            </a:solidFill>
+          </a:ln>
+          <a:effectLst/>
+        </p:spPr>
+        <p:txBody>
+          <a:bodyPr rtlCol="0" anchor="ctr"/>
+          <a:lstStyle/>
+          <a:p>
+            <a:pPr algn="ctr"/>
+          </a:p>
+        </p:txBody>
+      </p:sp>
+      <p:sp>
+        <p:nvSpPr>
+          <p:cNvPr id="9" name="C1-E31 text 7" descr="sci-ppt:o007"/>
+          <p:cNvSpPr txBox="1"/>
+          <p:nvPr/>
+        </p:nvSpPr>
+        <p:spPr>
+          <a:xfrm>
+            <a:off x="548640" y="3337560"/>
+            <a:ext cx="5120640" cy="239395"/>
+          </a:xfrm>
+          <a:prstGeom prst="rect">
+            <a:avLst/>
+          </a:prstGeom>
+          <a:noFill/>
+          <a:effectLst/>
+        </p:spPr>
+        <p:txBody>
+          <a:bodyPr wrap="none" lIns="18288" rIns="18288" tIns="18288" bIns="18288" anchor="t">
+            <a:spAutoFit/>
+          </a:bodyPr>
+          <a:lstStyle/>
+          <a:p>
+            <a:pPr algn="l">
+              <a:spcAft>
+                <a:spcPts val="0"/>
+              </a:spcAft>
+            </a:pPr>
+            <a:r>
+              <a:rPr sz="1250" b="1" i="0">
+                <a:solidFill>
+                  <a:srgbClr val="F28BA0"/>
+                </a:solidFill>
+                <a:latin typeface="Arial"/>
+              </a:rPr>
+              <a:t>fast rise: τₑ ≪ Lₑ/c</a:t>
+            </a:r>
+          </a:p>
+        </p:txBody>
+      </p:sp>
+      <p:sp>
+        <p:nvSpPr>
+          <p:cNvPr id="10" name="C1-E31 polygon 8" descr="sci-ppt:o008"/>
+          <p:cNvSpPr/>
+          <p:nvPr/>
+        </p:nvSpPr>
+        <p:spPr>
+          <a:xfrm>
+            <a:off x="548640" y="3840565"/>
+            <a:ext cx="5120640" cy="776866"/>
+          </a:xfrm>
+          <a:custGeom>
+            <a:avLst/>
+            <a:gdLst/>
+            <a:ahLst/>
+            <a:cxnLst/>
+            <a:rect l="l" t="t" r="r" b="b"/>
+            <a:pathLst>
+              <a:path w="5120640" h="776866">
+                <a:moveTo>
+                  <a:pt x="0" y="0"/>
+                </a:moveTo>
+                <a:lnTo>
+                  <a:pt x="64818" y="21"/>
+                </a:lnTo>
+                <a:lnTo>
+                  <a:pt x="129636" y="46"/>
+                </a:lnTo>
+                <a:lnTo>
+                  <a:pt x="194454" y="78"/>
+                </a:lnTo>
+                <a:lnTo>
+                  <a:pt x="259272" y="117"/>
+                </a:lnTo>
+                <a:lnTo>
+                  <a:pt x="324091" y="166"/>
+                </a:lnTo>
+                <a:lnTo>
+                  <a:pt x="388909" y="226"/>
+                </a:lnTo>
+                <a:lnTo>
+                  <a:pt x="453727" y="301"/>
+                </a:lnTo>
+                <a:lnTo>
+                  <a:pt x="518545" y="394"/>
+                </a:lnTo>
+                <a:lnTo>
+                  <a:pt x="583364" y="509"/>
+                </a:lnTo>
+                <a:lnTo>
+                  <a:pt x="648182" y="651"/>
+                </a:lnTo>
+                <a:lnTo>
+                  <a:pt x="713000" y="828"/>
+                </a:lnTo>
+                <a:lnTo>
+                  <a:pt x="777818" y="1047"/>
+                </a:lnTo>
+                <a:lnTo>
+                  <a:pt x="842636" y="1319"/>
+                </a:lnTo>
+                <a:lnTo>
+                  <a:pt x="907455" y="1656"/>
+                </a:lnTo>
+                <a:lnTo>
+                  <a:pt x="972273" y="2073"/>
+                </a:lnTo>
+                <a:lnTo>
+                  <a:pt x="1037091" y="2590"/>
+                </a:lnTo>
+                <a:lnTo>
+                  <a:pt x="1101909" y="3230"/>
+                </a:lnTo>
+                <a:lnTo>
+                  <a:pt x="1166728" y="4022"/>
+                </a:lnTo>
+                <a:lnTo>
+                  <a:pt x="1231546" y="5003"/>
+                </a:lnTo>
+                <a:lnTo>
+                  <a:pt x="1296364" y="6215"/>
+                </a:lnTo>
+                <a:lnTo>
+                  <a:pt x="1361182" y="7714"/>
+                </a:lnTo>
+                <a:lnTo>
+                  <a:pt x="1426001" y="9565"/>
+                </a:lnTo>
+                <a:lnTo>
+                  <a:pt x="1490819" y="11849"/>
+                </a:lnTo>
+                <a:lnTo>
+                  <a:pt x="1555637" y="14662"/>
+                </a:lnTo>
+                <a:lnTo>
+                  <a:pt x="1620455" y="18123"/>
+                </a:lnTo>
+                <a:lnTo>
+                  <a:pt x="1685273" y="22372"/>
+                </a:lnTo>
+                <a:lnTo>
+                  <a:pt x="1750092" y="27576"/>
+                </a:lnTo>
+                <a:lnTo>
+                  <a:pt x="1814910" y="33932"/>
+                </a:lnTo>
+                <a:lnTo>
+                  <a:pt x="1879728" y="41667"/>
+                </a:lnTo>
+                <a:lnTo>
+                  <a:pt x="1944546" y="51040"/>
+                </a:lnTo>
+                <a:lnTo>
+                  <a:pt x="2009365" y="62339"/>
+                </a:lnTo>
+                <a:lnTo>
+                  <a:pt x="2074183" y="75873"/>
+                </a:lnTo>
+                <a:lnTo>
+                  <a:pt x="2139001" y="91964"/>
+                </a:lnTo>
+                <a:lnTo>
+                  <a:pt x="2203819" y="110924"/>
+                </a:lnTo>
+                <a:lnTo>
+                  <a:pt x="2268637" y="133030"/>
+                </a:lnTo>
+                <a:lnTo>
+                  <a:pt x="2333456" y="158492"/>
+                </a:lnTo>
+                <a:lnTo>
+                  <a:pt x="2398274" y="187405"/>
+                </a:lnTo>
+                <a:lnTo>
+                  <a:pt x="2463092" y="219717"/>
+                </a:lnTo>
+                <a:lnTo>
+                  <a:pt x="2527910" y="255188"/>
+                </a:lnTo>
+                <a:lnTo>
+                  <a:pt x="2592729" y="293369"/>
+                </a:lnTo>
+                <a:lnTo>
+                  <a:pt x="2657547" y="333610"/>
+                </a:lnTo>
+                <a:lnTo>
+                  <a:pt x="2722365" y="375090"/>
+                </a:lnTo>
+                <a:lnTo>
+                  <a:pt x="2787183" y="416879"/>
+                </a:lnTo>
+                <a:lnTo>
+                  <a:pt x="2852002" y="458019"/>
+                </a:lnTo>
+                <a:lnTo>
+                  <a:pt x="2916820" y="497611"/>
+                </a:lnTo>
+                <a:lnTo>
+                  <a:pt x="2981638" y="534888"/>
+                </a:lnTo>
+                <a:lnTo>
+                  <a:pt x="3046456" y="569271"/>
+                </a:lnTo>
+                <a:lnTo>
+                  <a:pt x="3111274" y="600387"/>
+                </a:lnTo>
+                <a:lnTo>
+                  <a:pt x="3176093" y="628065"/>
+                </a:lnTo>
+                <a:lnTo>
+                  <a:pt x="3240911" y="652310"/>
+                </a:lnTo>
+                <a:lnTo>
+                  <a:pt x="3305729" y="673264"/>
+                </a:lnTo>
+                <a:lnTo>
+                  <a:pt x="3370547" y="691165"/>
+                </a:lnTo>
+                <a:lnTo>
+                  <a:pt x="3435366" y="706306"/>
+                </a:lnTo>
+                <a:lnTo>
+                  <a:pt x="3500184" y="719006"/>
+                </a:lnTo>
+                <a:lnTo>
+                  <a:pt x="3565002" y="729582"/>
+                </a:lnTo>
+                <a:lnTo>
+                  <a:pt x="3629820" y="738338"/>
+                </a:lnTo>
+                <a:lnTo>
+                  <a:pt x="3694638" y="745553"/>
+                </a:lnTo>
+                <a:lnTo>
+                  <a:pt x="3759457" y="751473"/>
+                </a:lnTo>
+                <a:lnTo>
+                  <a:pt x="3824275" y="756315"/>
+                </a:lnTo>
+                <a:lnTo>
+                  <a:pt x="3889093" y="760265"/>
+                </a:lnTo>
+                <a:lnTo>
+                  <a:pt x="3953911" y="763480"/>
+                </a:lnTo>
+                <a:lnTo>
+                  <a:pt x="4018730" y="766091"/>
+                </a:lnTo>
+                <a:lnTo>
+                  <a:pt x="4083548" y="768210"/>
+                </a:lnTo>
+                <a:lnTo>
+                  <a:pt x="4148366" y="769927"/>
+                </a:lnTo>
+                <a:lnTo>
+                  <a:pt x="4213184" y="771317"/>
+                </a:lnTo>
+                <a:lnTo>
+                  <a:pt x="4278003" y="772441"/>
+                </a:lnTo>
+                <a:lnTo>
+                  <a:pt x="4342821" y="773350"/>
+                </a:lnTo>
+                <a:lnTo>
+                  <a:pt x="4407639" y="774084"/>
+                </a:lnTo>
+                <a:lnTo>
+                  <a:pt x="4472457" y="774677"/>
+                </a:lnTo>
+                <a:lnTo>
+                  <a:pt x="4537275" y="775156"/>
+                </a:lnTo>
+                <a:lnTo>
+                  <a:pt x="4602094" y="775542"/>
+                </a:lnTo>
+                <a:lnTo>
+                  <a:pt x="4666912" y="775854"/>
+                </a:lnTo>
+                <a:lnTo>
+                  <a:pt x="4731730" y="776106"/>
+                </a:lnTo>
+                <a:lnTo>
+                  <a:pt x="4796548" y="776309"/>
+                </a:lnTo>
+                <a:lnTo>
+                  <a:pt x="4861367" y="776472"/>
+                </a:lnTo>
+                <a:lnTo>
+                  <a:pt x="4926185" y="776604"/>
+                </a:lnTo>
+                <a:lnTo>
+                  <a:pt x="4991003" y="776711"/>
+                </a:lnTo>
+                <a:lnTo>
+                  <a:pt x="5055821" y="776797"/>
+                </a:lnTo>
+                <a:lnTo>
+                  <a:pt x="5120640" y="776866"/>
+                </a:lnTo>
+              </a:path>
+            </a:pathLst>
+          </a:custGeom>
+          <a:noFill/>
+          <a:ln w="38100">
+            <a:solidFill>
+              <a:srgbClr val="F28BA0"/>
+            </a:solidFill>
+          </a:ln>
+          <a:effectLst/>
+        </p:spPr>
+        <p:txBody>
+          <a:bodyPr rtlCol="0" anchor="ctr"/>
+          <a:lstStyle/>
+          <a:p>
+            <a:pPr algn="ctr"/>
+          </a:p>
+        </p:txBody>
+      </p:sp>
+      <p:sp>
+        <p:nvSpPr>
+          <p:cNvPr id="11" name="C1-E31 text 9" descr="sci-ppt:o009"/>
+          <p:cNvSpPr txBox="1"/>
+          <p:nvPr/>
+        </p:nvSpPr>
+        <p:spPr>
+          <a:xfrm>
+            <a:off x="548640" y="4672584"/>
+            <a:ext cx="5120640" cy="208407"/>
+          </a:xfrm>
+          <a:prstGeom prst="rect">
+            <a:avLst/>
+          </a:prstGeom>
+          <a:noFill/>
+          <a:effectLst/>
+        </p:spPr>
+        <p:txBody>
+          <a:bodyPr wrap="none" lIns="18288" rIns="18288" tIns="18288" bIns="18288" anchor="t">
+            <a:spAutoFit/>
+          </a:bodyPr>
+          <a:lstStyle/>
+          <a:p>
+            <a:pPr algn="l">
+              <a:spcAft>
+                <a:spcPts val="0"/>
+              </a:spcAft>
+            </a:pPr>
+            <a:r>
+              <a:rPr sz="1050" b="0" i="0">
+                <a:solidFill>
+                  <a:srgbClr val="B4C7D2"/>
+                </a:solidFill>
+                <a:latin typeface="Arial"/>
+              </a:rPr>
+              <a:t>pressure along the column at one instant</a:t>
+            </a:r>
+          </a:p>
+        </p:txBody>
+      </p:sp>
+      <p:cxnSp>
+        <p:nvCxnSpPr>
+          <p:cNvPr id="12" name="C1-E31 line 10" descr="sci-ppt:o010"/>
+          <p:cNvCxnSpPr/>
+          <p:nvPr/>
+        </p:nvCxnSpPr>
+        <p:spPr>
+          <a:xfrm>
+            <a:off x="6858000" y="4709160"/>
+            <a:ext cx="4937760" cy="0"/>
+          </a:xfrm>
+          <a:prstGeom prst="line">
+            <a:avLst/>
+          </a:prstGeom>
           <a:ln w="19050">
             <a:solidFill>
               <a:srgbClr val="B4C7D2"/>
@@ -3160,71 +3977,21 @@
           </a:ln>
           <a:effectLst/>
         </p:spPr>
-        <p:txBody>
-          <a:bodyPr rtlCol="0" anchor="ctr"/>
-          <a:lstStyle/>
-          <a:p>
-            <a:pPr algn="ctr"/>
-          </a:p>
-        </p:txBody>
-      </p:sp>
-      <p:sp>
-        <p:nvSpPr>
-          <p:cNvPr id="4" name="text3" descr="sci-ppt:C1-E31-003"/>
-          <p:cNvSpPr txBox="1"/>
+      </p:cxnSp>
+      <p:cxnSp>
+        <p:nvCxnSpPr>
+          <p:cNvPr id="13" name="C1-E31 line 11" descr="sci-ppt:o011"/>
+          <p:cNvCxnSpPr/>
           <p:nvPr/>
-        </p:nvSpPr>
-        <p:spPr>
-          <a:xfrm>
-            <a:off x="1341120" y="1950720"/>
-            <a:ext cx="3474720" cy="340156"/>
-          </a:xfrm>
-          <a:prstGeom prst="rect">
+        </p:nvCxnSpPr>
+        <p:spPr>
+          <a:xfrm>
+            <a:off x="6858000" y="1417320"/>
+            <a:ext cx="0" cy="3291840"/>
+          </a:xfrm>
+          <a:prstGeom prst="line">
             <a:avLst/>
           </a:prstGeom>
-          <a:noFill/>
-          <a:effectLst/>
-        </p:spPr>
-        <p:txBody>
-          <a:bodyPr wrap="none" lIns="27432" rIns="27432" tIns="18288" bIns="18288" anchor="ctr">
-            <a:spAutoFit/>
-          </a:bodyPr>
-          <a:lstStyle/>
-          <a:p>
-            <a:pPr algn="l">
-              <a:spcAft>
-                <a:spcPts val="0"/>
-              </a:spcAft>
-            </a:pPr>
-            <a:r>
-              <a:rPr sz="1728" b="0" i="0">
-                <a:solidFill>
-                  <a:srgbClr val="E7F0F3"/>
-                </a:solidFill>
-                <a:latin typeface="Arial"/>
-              </a:rPr>
-              <a:t>Wall speed / sound speed</a:t>
-            </a:r>
-          </a:p>
-        </p:txBody>
-      </p:sp>
-      <p:sp>
-        <p:nvSpPr>
-          <p:cNvPr id="5" name="rect4" descr="sci-ppt:C1-E31-004"/>
-          <p:cNvSpPr/>
-          <p:nvPr/>
-        </p:nvSpPr>
-        <p:spPr>
-          <a:xfrm>
-            <a:off x="6949440" y="1828800"/>
-            <a:ext cx="3657600" cy="1158240"/>
-          </a:xfrm>
-          <a:prstGeom prst="rect">
-            <a:avLst/>
-          </a:prstGeom>
-          <a:solidFill>
-            <a:srgbClr val="213E4B"/>
-          </a:solidFill>
           <a:ln w="19050">
             <a:solidFill>
               <a:srgbClr val="B4C7D2"/>
@@ -3232,24 +3999,61 @@
           </a:ln>
           <a:effectLst/>
         </p:spPr>
-        <p:txBody>
-          <a:bodyPr rtlCol="0" anchor="ctr"/>
-          <a:lstStyle/>
-          <a:p>
-            <a:pPr algn="ctr"/>
-          </a:p>
-        </p:txBody>
-      </p:sp>
-      <p:sp>
-        <p:nvSpPr>
-          <p:cNvPr id="6" name="text5" descr="sci-ppt:C1-E31-005"/>
+      </p:cxnSp>
+      <p:cxnSp>
+        <p:nvCxnSpPr>
+          <p:cNvPr id="14" name="C1-E31 line 12" descr="sci-ppt:o012"/>
+          <p:cNvCxnSpPr/>
+          <p:nvPr/>
+        </p:nvCxnSpPr>
+        <p:spPr>
+          <a:xfrm>
+            <a:off x="6858000" y="4709160"/>
+            <a:ext cx="0" cy="64008"/>
+          </a:xfrm>
+          <a:prstGeom prst="line">
+            <a:avLst/>
+          </a:prstGeom>
+          <a:ln w="12700">
+            <a:solidFill>
+              <a:srgbClr val="B4C7D2"/>
+            </a:solidFill>
+          </a:ln>
+          <a:effectLst/>
+        </p:spPr>
+      </p:cxnSp>
+      <p:cxnSp>
+        <p:nvCxnSpPr>
+          <p:cNvPr id="15" name="C1-E31 line 13" descr="sci-ppt:o013"/>
+          <p:cNvCxnSpPr/>
+          <p:nvPr/>
+        </p:nvCxnSpPr>
+        <p:spPr>
+          <a:xfrm>
+            <a:off x="6858000" y="1417320"/>
+            <a:ext cx="0" cy="3291840"/>
+          </a:xfrm>
+          <a:prstGeom prst="line">
+            <a:avLst/>
+          </a:prstGeom>
+          <a:ln w="7620">
+            <a:solidFill>
+              <a:srgbClr val="2E4756"/>
+            </a:solidFill>
+          </a:ln>
+          <a:effectLst/>
+        </p:spPr>
+      </p:cxnSp>
+      <p:sp>
+        <p:nvSpPr>
+          <p:cNvPr id="16" name="C1-E31 text 14" descr="sci-ppt:o014"/>
           <p:cNvSpPr txBox="1"/>
           <p:nvPr/>
         </p:nvSpPr>
         <p:spPr>
           <a:xfrm>
-            <a:off x="7071360" y="1950720"/>
-            <a:ext cx="3474720" cy="340156"/>
+            <a:off x="6400800" y="4791456"/>
+            <a:ext cx="914400" cy="208407"/>
           </a:xfrm>
           <a:prstGeom prst="rect">
             <a:avLst/>
@@ -3258,7 +4062,529 @@
           <a:effectLst/>
         </p:spPr>
         <p:txBody>
-          <a:bodyPr wrap="none" lIns="27432" rIns="27432" tIns="18288" bIns="18288" anchor="ctr">
+          <a:bodyPr wrap="none" lIns="18288" rIns="18288" tIns="18288" bIns="18288" anchor="t">
+            <a:spAutoFit/>
+          </a:bodyPr>
+          <a:lstStyle/>
+          <a:p>
+            <a:pPr algn="ctr">
+              <a:spcAft>
+                <a:spcPts val="0"/>
+              </a:spcAft>
+            </a:pPr>
+            <a:r>
+              <a:rPr sz="1050" b="0" i="0">
+                <a:solidFill>
+                  <a:srgbClr val="B4C7D2"/>
+                </a:solidFill>
+                <a:latin typeface="Arial"/>
+              </a:rPr>
+              <a:t>1e-05</a:t>
+            </a:r>
+          </a:p>
+        </p:txBody>
+      </p:sp>
+      <p:cxnSp>
+        <p:nvCxnSpPr>
+          <p:cNvPr id="17" name="C1-E31 line 15" descr="sci-ppt:o015"/>
+          <p:cNvCxnSpPr/>
+          <p:nvPr/>
+        </p:nvCxnSpPr>
+        <p:spPr>
+          <a:xfrm>
+            <a:off x="8503920" y="4709160"/>
+            <a:ext cx="0" cy="64008"/>
+          </a:xfrm>
+          <a:prstGeom prst="line">
+            <a:avLst/>
+          </a:prstGeom>
+          <a:ln w="12700">
+            <a:solidFill>
+              <a:srgbClr val="B4C7D2"/>
+            </a:solidFill>
+          </a:ln>
+          <a:effectLst/>
+        </p:spPr>
+      </p:cxnSp>
+      <p:cxnSp>
+        <p:nvCxnSpPr>
+          <p:cNvPr id="18" name="C1-E31 line 16" descr="sci-ppt:o016"/>
+          <p:cNvCxnSpPr/>
+          <p:nvPr/>
+        </p:nvCxnSpPr>
+        <p:spPr>
+          <a:xfrm>
+            <a:off x="8503920" y="1417320"/>
+            <a:ext cx="0" cy="3291840"/>
+          </a:xfrm>
+          <a:prstGeom prst="line">
+            <a:avLst/>
+          </a:prstGeom>
+          <a:ln w="7620">
+            <a:solidFill>
+              <a:srgbClr val="2E4756"/>
+            </a:solidFill>
+          </a:ln>
+          <a:effectLst/>
+        </p:spPr>
+      </p:cxnSp>
+      <p:sp>
+        <p:nvSpPr>
+          <p:cNvPr id="19" name="C1-E31 text 17" descr="sci-ppt:o017"/>
+          <p:cNvSpPr txBox="1"/>
+          <p:nvPr/>
+        </p:nvSpPr>
+        <p:spPr>
+          <a:xfrm>
+            <a:off x="8046720" y="4791456"/>
+            <a:ext cx="914400" cy="208407"/>
+          </a:xfrm>
+          <a:prstGeom prst="rect">
+            <a:avLst/>
+          </a:prstGeom>
+          <a:noFill/>
+          <a:effectLst/>
+        </p:spPr>
+        <p:txBody>
+          <a:bodyPr wrap="none" lIns="18288" rIns="18288" tIns="18288" bIns="18288" anchor="t">
+            <a:spAutoFit/>
+          </a:bodyPr>
+          <a:lstStyle/>
+          <a:p>
+            <a:pPr algn="ctr">
+              <a:spcAft>
+                <a:spcPts val="0"/>
+              </a:spcAft>
+            </a:pPr>
+            <a:r>
+              <a:rPr sz="1050" b="0" i="0">
+                <a:solidFill>
+                  <a:srgbClr val="B4C7D2"/>
+                </a:solidFill>
+                <a:latin typeface="Arial"/>
+              </a:rPr>
+              <a:t>1e-04</a:t>
+            </a:r>
+          </a:p>
+        </p:txBody>
+      </p:sp>
+      <p:cxnSp>
+        <p:nvCxnSpPr>
+          <p:cNvPr id="20" name="C1-E31 line 18" descr="sci-ppt:o018"/>
+          <p:cNvCxnSpPr/>
+          <p:nvPr/>
+        </p:nvCxnSpPr>
+        <p:spPr>
+          <a:xfrm>
+            <a:off x="10149840" y="4709160"/>
+            <a:ext cx="0" cy="64008"/>
+          </a:xfrm>
+          <a:prstGeom prst="line">
+            <a:avLst/>
+          </a:prstGeom>
+          <a:ln w="12700">
+            <a:solidFill>
+              <a:srgbClr val="B4C7D2"/>
+            </a:solidFill>
+          </a:ln>
+          <a:effectLst/>
+        </p:spPr>
+      </p:cxnSp>
+      <p:cxnSp>
+        <p:nvCxnSpPr>
+          <p:cNvPr id="21" name="C1-E31 line 19" descr="sci-ppt:o019"/>
+          <p:cNvCxnSpPr/>
+          <p:nvPr/>
+        </p:nvCxnSpPr>
+        <p:spPr>
+          <a:xfrm>
+            <a:off x="10149840" y="1417320"/>
+            <a:ext cx="0" cy="3291840"/>
+          </a:xfrm>
+          <a:prstGeom prst="line">
+            <a:avLst/>
+          </a:prstGeom>
+          <a:ln w="7620">
+            <a:solidFill>
+              <a:srgbClr val="2E4756"/>
+            </a:solidFill>
+          </a:ln>
+          <a:effectLst/>
+        </p:spPr>
+      </p:cxnSp>
+      <p:sp>
+        <p:nvSpPr>
+          <p:cNvPr id="22" name="C1-E31 text 20" descr="sci-ppt:o020"/>
+          <p:cNvSpPr txBox="1"/>
+          <p:nvPr/>
+        </p:nvSpPr>
+        <p:spPr>
+          <a:xfrm>
+            <a:off x="9692640" y="4791456"/>
+            <a:ext cx="914400" cy="208407"/>
+          </a:xfrm>
+          <a:prstGeom prst="rect">
+            <a:avLst/>
+          </a:prstGeom>
+          <a:noFill/>
+          <a:effectLst/>
+        </p:spPr>
+        <p:txBody>
+          <a:bodyPr wrap="none" lIns="18288" rIns="18288" tIns="18288" bIns="18288" anchor="t">
+            <a:spAutoFit/>
+          </a:bodyPr>
+          <a:lstStyle/>
+          <a:p>
+            <a:pPr algn="ctr">
+              <a:spcAft>
+                <a:spcPts val="0"/>
+              </a:spcAft>
+            </a:pPr>
+            <a:r>
+              <a:rPr sz="1050" b="0" i="0">
+                <a:solidFill>
+                  <a:srgbClr val="B4C7D2"/>
+                </a:solidFill>
+                <a:latin typeface="Arial"/>
+              </a:rPr>
+              <a:t>1e-03</a:t>
+            </a:r>
+          </a:p>
+        </p:txBody>
+      </p:sp>
+      <p:cxnSp>
+        <p:nvCxnSpPr>
+          <p:cNvPr id="23" name="C1-E31 line 21" descr="sci-ppt:o021"/>
+          <p:cNvCxnSpPr/>
+          <p:nvPr/>
+        </p:nvCxnSpPr>
+        <p:spPr>
+          <a:xfrm>
+            <a:off x="11795760" y="4709160"/>
+            <a:ext cx="0" cy="64008"/>
+          </a:xfrm>
+          <a:prstGeom prst="line">
+            <a:avLst/>
+          </a:prstGeom>
+          <a:ln w="12700">
+            <a:solidFill>
+              <a:srgbClr val="B4C7D2"/>
+            </a:solidFill>
+          </a:ln>
+          <a:effectLst/>
+        </p:spPr>
+      </p:cxnSp>
+      <p:cxnSp>
+        <p:nvCxnSpPr>
+          <p:cNvPr id="24" name="C1-E31 line 22" descr="sci-ppt:o022"/>
+          <p:cNvCxnSpPr/>
+          <p:nvPr/>
+        </p:nvCxnSpPr>
+        <p:spPr>
+          <a:xfrm>
+            <a:off x="11795760" y="1417320"/>
+            <a:ext cx="0" cy="3291840"/>
+          </a:xfrm>
+          <a:prstGeom prst="line">
+            <a:avLst/>
+          </a:prstGeom>
+          <a:ln w="7620">
+            <a:solidFill>
+              <a:srgbClr val="2E4756"/>
+            </a:solidFill>
+          </a:ln>
+          <a:effectLst/>
+        </p:spPr>
+      </p:cxnSp>
+      <p:sp>
+        <p:nvSpPr>
+          <p:cNvPr id="25" name="C1-E31 text 23" descr="sci-ppt:o023"/>
+          <p:cNvSpPr txBox="1"/>
+          <p:nvPr/>
+        </p:nvSpPr>
+        <p:spPr>
+          <a:xfrm>
+            <a:off x="11338560" y="4791456"/>
+            <a:ext cx="914400" cy="208407"/>
+          </a:xfrm>
+          <a:prstGeom prst="rect">
+            <a:avLst/>
+          </a:prstGeom>
+          <a:noFill/>
+          <a:effectLst/>
+        </p:spPr>
+        <p:txBody>
+          <a:bodyPr wrap="none" lIns="18288" rIns="18288" tIns="18288" bIns="18288" anchor="t">
+            <a:spAutoFit/>
+          </a:bodyPr>
+          <a:lstStyle/>
+          <a:p>
+            <a:pPr algn="ctr">
+              <a:spcAft>
+                <a:spcPts val="0"/>
+              </a:spcAft>
+            </a:pPr>
+            <a:r>
+              <a:rPr sz="1050" b="0" i="0">
+                <a:solidFill>
+                  <a:srgbClr val="B4C7D2"/>
+                </a:solidFill>
+                <a:latin typeface="Arial"/>
+              </a:rPr>
+              <a:t>1e-02</a:t>
+            </a:r>
+          </a:p>
+        </p:txBody>
+      </p:sp>
+      <p:cxnSp>
+        <p:nvCxnSpPr>
+          <p:cNvPr id="26" name="C1-E31 line 24" descr="sci-ppt:o024"/>
+          <p:cNvCxnSpPr/>
+          <p:nvPr/>
+        </p:nvCxnSpPr>
+        <p:spPr>
+          <a:xfrm>
+            <a:off x="6793992" y="4709160"/>
+            <a:ext cx="64008" cy="0"/>
+          </a:xfrm>
+          <a:prstGeom prst="line">
+            <a:avLst/>
+          </a:prstGeom>
+          <a:ln w="12700">
+            <a:solidFill>
+              <a:srgbClr val="B4C7D2"/>
+            </a:solidFill>
+          </a:ln>
+          <a:effectLst/>
+        </p:spPr>
+      </p:cxnSp>
+      <p:cxnSp>
+        <p:nvCxnSpPr>
+          <p:cNvPr id="27" name="C1-E31 line 25" descr="sci-ppt:o025"/>
+          <p:cNvCxnSpPr/>
+          <p:nvPr/>
+        </p:nvCxnSpPr>
+        <p:spPr>
+          <a:xfrm>
+            <a:off x="6793992" y="3063240"/>
+            <a:ext cx="64008" cy="0"/>
+          </a:xfrm>
+          <a:prstGeom prst="line">
+            <a:avLst/>
+          </a:prstGeom>
+          <a:ln w="12700">
+            <a:solidFill>
+              <a:srgbClr val="B4C7D2"/>
+            </a:solidFill>
+          </a:ln>
+          <a:effectLst/>
+        </p:spPr>
+      </p:cxnSp>
+      <p:cxnSp>
+        <p:nvCxnSpPr>
+          <p:cNvPr id="28" name="C1-E31 line 26" descr="sci-ppt:o026"/>
+          <p:cNvCxnSpPr/>
+          <p:nvPr/>
+        </p:nvCxnSpPr>
+        <p:spPr>
+          <a:xfrm>
+            <a:off x="6858000" y="3063240"/>
+            <a:ext cx="4937760" cy="0"/>
+          </a:xfrm>
+          <a:prstGeom prst="line">
+            <a:avLst/>
+          </a:prstGeom>
+          <a:ln w="7620">
+            <a:solidFill>
+              <a:srgbClr val="2E4756"/>
+            </a:solidFill>
+          </a:ln>
+          <a:effectLst/>
+        </p:spPr>
+      </p:cxnSp>
+      <p:sp>
+        <p:nvSpPr>
+          <p:cNvPr id="29" name="C1-E31 text 27" descr="sci-ppt:o027"/>
+          <p:cNvSpPr txBox="1"/>
+          <p:nvPr/>
+        </p:nvSpPr>
+        <p:spPr>
+          <a:xfrm>
+            <a:off x="5989320" y="2980944"/>
+            <a:ext cx="777240" cy="208407"/>
+          </a:xfrm>
+          <a:prstGeom prst="rect">
+            <a:avLst/>
+          </a:prstGeom>
+          <a:noFill/>
+          <a:effectLst/>
+        </p:spPr>
+        <p:txBody>
+          <a:bodyPr wrap="none" lIns="18288" rIns="18288" tIns="18288" bIns="18288" anchor="t">
+            <a:spAutoFit/>
+          </a:bodyPr>
+          <a:lstStyle/>
+          <a:p>
+            <a:pPr algn="r">
+              <a:spcAft>
+                <a:spcPts val="0"/>
+              </a:spcAft>
+            </a:pPr>
+            <a:r>
+              <a:rPr sz="1050" b="0" i="0">
+                <a:solidFill>
+                  <a:srgbClr val="B4C7D2"/>
+                </a:solidFill>
+                <a:latin typeface="Arial"/>
+              </a:rPr>
+              <a:t>1e+00</a:t>
+            </a:r>
+          </a:p>
+        </p:txBody>
+      </p:sp>
+      <p:cxnSp>
+        <p:nvCxnSpPr>
+          <p:cNvPr id="30" name="C1-E31 line 28" descr="sci-ppt:o028"/>
+          <p:cNvCxnSpPr/>
+          <p:nvPr/>
+        </p:nvCxnSpPr>
+        <p:spPr>
+          <a:xfrm>
+            <a:off x="6793992" y="1417320"/>
+            <a:ext cx="64008" cy="0"/>
+          </a:xfrm>
+          <a:prstGeom prst="line">
+            <a:avLst/>
+          </a:prstGeom>
+          <a:ln w="12700">
+            <a:solidFill>
+              <a:srgbClr val="B4C7D2"/>
+            </a:solidFill>
+          </a:ln>
+          <a:effectLst/>
+        </p:spPr>
+      </p:cxnSp>
+      <p:cxnSp>
+        <p:nvCxnSpPr>
+          <p:cNvPr id="31" name="C1-E31 line 29" descr="sci-ppt:o029"/>
+          <p:cNvCxnSpPr/>
+          <p:nvPr/>
+        </p:nvCxnSpPr>
+        <p:spPr>
+          <a:xfrm>
+            <a:off x="6858000" y="1417320"/>
+            <a:ext cx="4937760" cy="0"/>
+          </a:xfrm>
+          <a:prstGeom prst="line">
+            <a:avLst/>
+          </a:prstGeom>
+          <a:ln w="7620">
+            <a:solidFill>
+              <a:srgbClr val="2E4756"/>
+            </a:solidFill>
+          </a:ln>
+          <a:effectLst/>
+        </p:spPr>
+      </p:cxnSp>
+      <p:sp>
+        <p:nvSpPr>
+          <p:cNvPr id="32" name="C1-E31 text 30" descr="sci-ppt:o030"/>
+          <p:cNvSpPr txBox="1"/>
+          <p:nvPr/>
+        </p:nvSpPr>
+        <p:spPr>
+          <a:xfrm>
+            <a:off x="5989320" y="1335024"/>
+            <a:ext cx="777240" cy="208407"/>
+          </a:xfrm>
+          <a:prstGeom prst="rect">
+            <a:avLst/>
+          </a:prstGeom>
+          <a:noFill/>
+          <a:effectLst/>
+        </p:spPr>
+        <p:txBody>
+          <a:bodyPr wrap="none" lIns="18288" rIns="18288" tIns="18288" bIns="18288" anchor="t">
+            <a:spAutoFit/>
+          </a:bodyPr>
+          <a:lstStyle/>
+          <a:p>
+            <a:pPr algn="r">
+              <a:spcAft>
+                <a:spcPts val="0"/>
+              </a:spcAft>
+            </a:pPr>
+            <a:r>
+              <a:rPr sz="1050" b="0" i="0">
+                <a:solidFill>
+                  <a:srgbClr val="B4C7D2"/>
+                </a:solidFill>
+                <a:latin typeface="Arial"/>
+              </a:rPr>
+              <a:t>1e+02</a:t>
+            </a:r>
+          </a:p>
+        </p:txBody>
+      </p:sp>
+      <p:sp>
+        <p:nvSpPr>
+          <p:cNvPr id="33" name="C1-E31 text 31" descr="sci-ppt:o031"/>
+          <p:cNvSpPr txBox="1"/>
+          <p:nvPr/>
+        </p:nvSpPr>
+        <p:spPr>
+          <a:xfrm>
+            <a:off x="6858000" y="4992624"/>
+            <a:ext cx="4937760" cy="231648"/>
+          </a:xfrm>
+          <a:prstGeom prst="rect">
+            <a:avLst/>
+          </a:prstGeom>
+          <a:noFill/>
+          <a:effectLst/>
+        </p:spPr>
+        <p:txBody>
+          <a:bodyPr wrap="none" lIns="18288" rIns="18288" tIns="18288" bIns="18288" anchor="t">
+            <a:spAutoFit/>
+          </a:bodyPr>
+          <a:lstStyle/>
+          <a:p>
+            <a:pPr algn="ctr">
+              <a:spcAft>
+                <a:spcPts val="0"/>
+              </a:spcAft>
+            </a:pPr>
+            <a:r>
+              <a:rPr sz="1200" b="0" i="0">
+                <a:solidFill>
+                  <a:srgbClr val="E7F0F3"/>
+                </a:solidFill>
+                <a:latin typeface="Arial"/>
+              </a:rPr>
+              <a:t>communication length Lₑ  (m)</a:t>
+            </a:r>
+          </a:p>
+        </p:txBody>
+      </p:sp>
+      <p:sp>
+        <p:nvSpPr>
+          <p:cNvPr id="34" name="C1-E31 text 32" descr="sci-ppt:o032"/>
+          <p:cNvSpPr txBox="1"/>
+          <p:nvPr/>
+        </p:nvSpPr>
+        <p:spPr>
+          <a:xfrm>
+            <a:off x="6309360" y="1069848"/>
+            <a:ext cx="4937760" cy="231648"/>
+          </a:xfrm>
+          <a:prstGeom prst="rect">
+            <a:avLst/>
+          </a:prstGeom>
+          <a:noFill/>
+          <a:effectLst/>
+        </p:spPr>
+        <p:txBody>
+          <a:bodyPr wrap="none" lIns="18288" rIns="18288" tIns="18288" bIns="18288" anchor="t">
             <a:spAutoFit/>
           </a:bodyPr>
           <a:lstStyle/>
@@ -3269,51 +4595,609 @@
               </a:spcAft>
             </a:pPr>
             <a:r>
-              <a:rPr sz="1728" b="0" i="0">
+              <a:rPr sz="1200" b="0" i="0">
                 <a:solidFill>
                   <a:srgbClr val="E7F0F3"/>
                 </a:solidFill>
                 <a:latin typeface="Arial"/>
               </a:rPr>
-              <a:t>Propagation / event time</a:t>
-            </a:r>
+              <a:t>𝒞ₑ = Lₑ / (c τₑ)</a:t>
+            </a:r>
+          </a:p>
+        </p:txBody>
+      </p:sp>
+      <p:sp>
+        <p:nvSpPr>
+          <p:cNvPr id="35" name="C1-E31 polygon 33" descr="sci-ppt:o033"/>
+          <p:cNvSpPr/>
+          <p:nvPr/>
+        </p:nvSpPr>
+        <p:spPr>
+          <a:xfrm>
+            <a:off x="6858000" y="1562236"/>
+            <a:ext cx="4937760" cy="2468880"/>
+          </a:xfrm>
+          <a:custGeom>
+            <a:avLst/>
+            <a:gdLst/>
+            <a:ahLst/>
+            <a:cxnLst/>
+            <a:rect l="l" t="t" r="r" b="b"/>
+            <a:pathLst>
+              <a:path w="4937760" h="2468880">
+                <a:moveTo>
+                  <a:pt x="0" y="2468880"/>
+                </a:moveTo>
+                <a:lnTo>
+                  <a:pt x="49876" y="2443941"/>
+                </a:lnTo>
+                <a:lnTo>
+                  <a:pt x="99752" y="2419003"/>
+                </a:lnTo>
+                <a:lnTo>
+                  <a:pt x="149629" y="2394065"/>
+                </a:lnTo>
+                <a:lnTo>
+                  <a:pt x="199505" y="2369127"/>
+                </a:lnTo>
+                <a:lnTo>
+                  <a:pt x="249381" y="2344189"/>
+                </a:lnTo>
+                <a:lnTo>
+                  <a:pt x="299258" y="2319250"/>
+                </a:lnTo>
+                <a:lnTo>
+                  <a:pt x="349134" y="2294312"/>
+                </a:lnTo>
+                <a:lnTo>
+                  <a:pt x="399010" y="2269374"/>
+                </a:lnTo>
+                <a:lnTo>
+                  <a:pt x="448887" y="2244436"/>
+                </a:lnTo>
+                <a:lnTo>
+                  <a:pt x="498763" y="2219498"/>
+                </a:lnTo>
+                <a:lnTo>
+                  <a:pt x="548640" y="2194560"/>
+                </a:lnTo>
+                <a:lnTo>
+                  <a:pt x="598516" y="2169621"/>
+                </a:lnTo>
+                <a:lnTo>
+                  <a:pt x="648392" y="2144683"/>
+                </a:lnTo>
+                <a:lnTo>
+                  <a:pt x="698269" y="2119745"/>
+                </a:lnTo>
+                <a:lnTo>
+                  <a:pt x="748145" y="2094807"/>
+                </a:lnTo>
+                <a:lnTo>
+                  <a:pt x="798021" y="2069869"/>
+                </a:lnTo>
+                <a:lnTo>
+                  <a:pt x="847898" y="2044930"/>
+                </a:lnTo>
+                <a:lnTo>
+                  <a:pt x="897774" y="2019992"/>
+                </a:lnTo>
+                <a:lnTo>
+                  <a:pt x="947650" y="1995054"/>
+                </a:lnTo>
+                <a:lnTo>
+                  <a:pt x="997527" y="1970116"/>
+                </a:lnTo>
+                <a:lnTo>
+                  <a:pt x="1047403" y="1945178"/>
+                </a:lnTo>
+                <a:lnTo>
+                  <a:pt x="1097280" y="1920240"/>
+                </a:lnTo>
+                <a:lnTo>
+                  <a:pt x="1147156" y="1895301"/>
+                </a:lnTo>
+                <a:lnTo>
+                  <a:pt x="1197032" y="1870363"/>
+                </a:lnTo>
+                <a:lnTo>
+                  <a:pt x="1246909" y="1845425"/>
+                </a:lnTo>
+                <a:lnTo>
+                  <a:pt x="1296785" y="1820487"/>
+                </a:lnTo>
+                <a:lnTo>
+                  <a:pt x="1346661" y="1795549"/>
+                </a:lnTo>
+                <a:lnTo>
+                  <a:pt x="1396538" y="1770610"/>
+                </a:lnTo>
+                <a:lnTo>
+                  <a:pt x="1446414" y="1745672"/>
+                </a:lnTo>
+                <a:lnTo>
+                  <a:pt x="1496290" y="1720734"/>
+                </a:lnTo>
+                <a:lnTo>
+                  <a:pt x="1546167" y="1695796"/>
+                </a:lnTo>
+                <a:lnTo>
+                  <a:pt x="1596043" y="1670858"/>
+                </a:lnTo>
+                <a:lnTo>
+                  <a:pt x="1645920" y="1645920"/>
+                </a:lnTo>
+                <a:lnTo>
+                  <a:pt x="1695796" y="1620981"/>
+                </a:lnTo>
+                <a:lnTo>
+                  <a:pt x="1745672" y="1596043"/>
+                </a:lnTo>
+                <a:lnTo>
+                  <a:pt x="1795549" y="1571105"/>
+                </a:lnTo>
+                <a:lnTo>
+                  <a:pt x="1845425" y="1546167"/>
+                </a:lnTo>
+                <a:lnTo>
+                  <a:pt x="1895301" y="1521229"/>
+                </a:lnTo>
+                <a:lnTo>
+                  <a:pt x="1945178" y="1496290"/>
+                </a:lnTo>
+                <a:lnTo>
+                  <a:pt x="1995054" y="1471352"/>
+                </a:lnTo>
+                <a:lnTo>
+                  <a:pt x="2044930" y="1446414"/>
+                </a:lnTo>
+                <a:lnTo>
+                  <a:pt x="2094807" y="1421476"/>
+                </a:lnTo>
+                <a:lnTo>
+                  <a:pt x="2144683" y="1396538"/>
+                </a:lnTo>
+                <a:lnTo>
+                  <a:pt x="2194560" y="1371600"/>
+                </a:lnTo>
+                <a:lnTo>
+                  <a:pt x="2244436" y="1346661"/>
+                </a:lnTo>
+                <a:lnTo>
+                  <a:pt x="2294312" y="1321723"/>
+                </a:lnTo>
+                <a:lnTo>
+                  <a:pt x="2344189" y="1296785"/>
+                </a:lnTo>
+                <a:lnTo>
+                  <a:pt x="2394065" y="1271847"/>
+                </a:lnTo>
+                <a:lnTo>
+                  <a:pt x="2443941" y="1246909"/>
+                </a:lnTo>
+                <a:lnTo>
+                  <a:pt x="2493818" y="1221970"/>
+                </a:lnTo>
+                <a:lnTo>
+                  <a:pt x="2543694" y="1197032"/>
+                </a:lnTo>
+                <a:lnTo>
+                  <a:pt x="2593570" y="1172094"/>
+                </a:lnTo>
+                <a:lnTo>
+                  <a:pt x="2643447" y="1147156"/>
+                </a:lnTo>
+                <a:lnTo>
+                  <a:pt x="2693323" y="1122218"/>
+                </a:lnTo>
+                <a:lnTo>
+                  <a:pt x="2743200" y="1097280"/>
+                </a:lnTo>
+                <a:lnTo>
+                  <a:pt x="2793076" y="1072341"/>
+                </a:lnTo>
+                <a:lnTo>
+                  <a:pt x="2842952" y="1047403"/>
+                </a:lnTo>
+                <a:lnTo>
+                  <a:pt x="2892829" y="1022465"/>
+                </a:lnTo>
+                <a:lnTo>
+                  <a:pt x="2942705" y="997527"/>
+                </a:lnTo>
+                <a:lnTo>
+                  <a:pt x="2992581" y="972589"/>
+                </a:lnTo>
+                <a:lnTo>
+                  <a:pt x="3042458" y="947650"/>
+                </a:lnTo>
+                <a:lnTo>
+                  <a:pt x="3092334" y="922712"/>
+                </a:lnTo>
+                <a:lnTo>
+                  <a:pt x="3142210" y="897774"/>
+                </a:lnTo>
+                <a:lnTo>
+                  <a:pt x="3192087" y="872836"/>
+                </a:lnTo>
+                <a:lnTo>
+                  <a:pt x="3241963" y="847898"/>
+                </a:lnTo>
+                <a:lnTo>
+                  <a:pt x="3291840" y="822960"/>
+                </a:lnTo>
+                <a:lnTo>
+                  <a:pt x="3341716" y="798021"/>
+                </a:lnTo>
+                <a:lnTo>
+                  <a:pt x="3391592" y="773083"/>
+                </a:lnTo>
+                <a:lnTo>
+                  <a:pt x="3441469" y="748145"/>
+                </a:lnTo>
+                <a:lnTo>
+                  <a:pt x="3491345" y="723207"/>
+                </a:lnTo>
+                <a:lnTo>
+                  <a:pt x="3541221" y="698269"/>
+                </a:lnTo>
+                <a:lnTo>
+                  <a:pt x="3591098" y="673330"/>
+                </a:lnTo>
+                <a:lnTo>
+                  <a:pt x="3640974" y="648392"/>
+                </a:lnTo>
+                <a:lnTo>
+                  <a:pt x="3690850" y="623454"/>
+                </a:lnTo>
+                <a:lnTo>
+                  <a:pt x="3740727" y="598516"/>
+                </a:lnTo>
+                <a:lnTo>
+                  <a:pt x="3790603" y="573578"/>
+                </a:lnTo>
+                <a:lnTo>
+                  <a:pt x="3840480" y="548640"/>
+                </a:lnTo>
+                <a:lnTo>
+                  <a:pt x="3890356" y="523701"/>
+                </a:lnTo>
+                <a:lnTo>
+                  <a:pt x="3940232" y="498763"/>
+                </a:lnTo>
+                <a:lnTo>
+                  <a:pt x="3990109" y="473825"/>
+                </a:lnTo>
+                <a:lnTo>
+                  <a:pt x="4039985" y="448887"/>
+                </a:lnTo>
+                <a:lnTo>
+                  <a:pt x="4089861" y="423949"/>
+                </a:lnTo>
+                <a:lnTo>
+                  <a:pt x="4139738" y="399010"/>
+                </a:lnTo>
+                <a:lnTo>
+                  <a:pt x="4189614" y="374072"/>
+                </a:lnTo>
+                <a:lnTo>
+                  <a:pt x="4239490" y="349134"/>
+                </a:lnTo>
+                <a:lnTo>
+                  <a:pt x="4289367" y="324196"/>
+                </a:lnTo>
+                <a:lnTo>
+                  <a:pt x="4339243" y="299258"/>
+                </a:lnTo>
+                <a:lnTo>
+                  <a:pt x="4389120" y="274320"/>
+                </a:lnTo>
+                <a:lnTo>
+                  <a:pt x="4438996" y="249381"/>
+                </a:lnTo>
+                <a:lnTo>
+                  <a:pt x="4488872" y="224443"/>
+                </a:lnTo>
+                <a:lnTo>
+                  <a:pt x="4538749" y="199505"/>
+                </a:lnTo>
+                <a:lnTo>
+                  <a:pt x="4588625" y="174567"/>
+                </a:lnTo>
+                <a:lnTo>
+                  <a:pt x="4638501" y="149629"/>
+                </a:lnTo>
+                <a:lnTo>
+                  <a:pt x="4688378" y="124690"/>
+                </a:lnTo>
+                <a:lnTo>
+                  <a:pt x="4738254" y="99752"/>
+                </a:lnTo>
+                <a:lnTo>
+                  <a:pt x="4788130" y="74814"/>
+                </a:lnTo>
+                <a:lnTo>
+                  <a:pt x="4838007" y="49876"/>
+                </a:lnTo>
+                <a:lnTo>
+                  <a:pt x="4887883" y="24938"/>
+                </a:lnTo>
+                <a:lnTo>
+                  <a:pt x="4937760" y="0"/>
+                </a:lnTo>
+              </a:path>
+            </a:pathLst>
+          </a:custGeom>
+          <a:noFill/>
+          <a:ln w="38100">
+            <a:solidFill>
+              <a:srgbClr val="F28BA0"/>
+            </a:solidFill>
+          </a:ln>
+          <a:effectLst/>
+        </p:spPr>
+        <p:txBody>
+          <a:bodyPr rtlCol="0" anchor="ctr"/>
+          <a:lstStyle/>
+          <a:p>
+            <a:pPr algn="ctr"/>
+          </a:p>
+        </p:txBody>
+      </p:sp>
+      <p:sp>
+        <p:nvSpPr>
+          <p:cNvPr id="36" name="C1-E31 polygon 34" descr="sci-ppt:o034"/>
+          <p:cNvSpPr/>
+          <p:nvPr/>
+        </p:nvSpPr>
+        <p:spPr>
+          <a:xfrm>
+            <a:off x="8803178" y="3208156"/>
+            <a:ext cx="2992582" cy="1496290"/>
+          </a:xfrm>
+          <a:custGeom>
+            <a:avLst/>
+            <a:gdLst/>
+            <a:ahLst/>
+            <a:cxnLst/>
+            <a:rect l="l" t="t" r="r" b="b"/>
+            <a:pathLst>
+              <a:path w="2992582" h="1496290">
+                <a:moveTo>
+                  <a:pt x="0" y="1496290"/>
+                </a:moveTo>
+                <a:lnTo>
+                  <a:pt x="49876" y="1471352"/>
+                </a:lnTo>
+                <a:lnTo>
+                  <a:pt x="99752" y="1446414"/>
+                </a:lnTo>
+                <a:lnTo>
+                  <a:pt x="149629" y="1421476"/>
+                </a:lnTo>
+                <a:lnTo>
+                  <a:pt x="199505" y="1396538"/>
+                </a:lnTo>
+                <a:lnTo>
+                  <a:pt x="249382" y="1371600"/>
+                </a:lnTo>
+                <a:lnTo>
+                  <a:pt x="299258" y="1346661"/>
+                </a:lnTo>
+                <a:lnTo>
+                  <a:pt x="349134" y="1321723"/>
+                </a:lnTo>
+                <a:lnTo>
+                  <a:pt x="399011" y="1296785"/>
+                </a:lnTo>
+                <a:lnTo>
+                  <a:pt x="448887" y="1271847"/>
+                </a:lnTo>
+                <a:lnTo>
+                  <a:pt x="498763" y="1246909"/>
+                </a:lnTo>
+                <a:lnTo>
+                  <a:pt x="548640" y="1221970"/>
+                </a:lnTo>
+                <a:lnTo>
+                  <a:pt x="598516" y="1197032"/>
+                </a:lnTo>
+                <a:lnTo>
+                  <a:pt x="648392" y="1172094"/>
+                </a:lnTo>
+                <a:lnTo>
+                  <a:pt x="698269" y="1147156"/>
+                </a:lnTo>
+                <a:lnTo>
+                  <a:pt x="748145" y="1122218"/>
+                </a:lnTo>
+                <a:lnTo>
+                  <a:pt x="798022" y="1097280"/>
+                </a:lnTo>
+                <a:lnTo>
+                  <a:pt x="847898" y="1072341"/>
+                </a:lnTo>
+                <a:lnTo>
+                  <a:pt x="897774" y="1047403"/>
+                </a:lnTo>
+                <a:lnTo>
+                  <a:pt x="947651" y="1022465"/>
+                </a:lnTo>
+                <a:lnTo>
+                  <a:pt x="997527" y="997527"/>
+                </a:lnTo>
+                <a:lnTo>
+                  <a:pt x="1047403" y="972589"/>
+                </a:lnTo>
+                <a:lnTo>
+                  <a:pt x="1097280" y="947650"/>
+                </a:lnTo>
+                <a:lnTo>
+                  <a:pt x="1147156" y="922712"/>
+                </a:lnTo>
+                <a:lnTo>
+                  <a:pt x="1197032" y="897774"/>
+                </a:lnTo>
+                <a:lnTo>
+                  <a:pt x="1246909" y="872836"/>
+                </a:lnTo>
+                <a:lnTo>
+                  <a:pt x="1296785" y="847898"/>
+                </a:lnTo>
+                <a:lnTo>
+                  <a:pt x="1346662" y="822960"/>
+                </a:lnTo>
+                <a:lnTo>
+                  <a:pt x="1396538" y="798021"/>
+                </a:lnTo>
+                <a:lnTo>
+                  <a:pt x="1446414" y="773083"/>
+                </a:lnTo>
+                <a:lnTo>
+                  <a:pt x="1496291" y="748145"/>
+                </a:lnTo>
+                <a:lnTo>
+                  <a:pt x="1546167" y="723207"/>
+                </a:lnTo>
+                <a:lnTo>
+                  <a:pt x="1596043" y="698269"/>
+                </a:lnTo>
+                <a:lnTo>
+                  <a:pt x="1645920" y="673330"/>
+                </a:lnTo>
+                <a:lnTo>
+                  <a:pt x="1695796" y="648392"/>
+                </a:lnTo>
+                <a:lnTo>
+                  <a:pt x="1745672" y="623454"/>
+                </a:lnTo>
+                <a:lnTo>
+                  <a:pt x="1795549" y="598516"/>
+                </a:lnTo>
+                <a:lnTo>
+                  <a:pt x="1845425" y="573578"/>
+                </a:lnTo>
+                <a:lnTo>
+                  <a:pt x="1895302" y="548640"/>
+                </a:lnTo>
+                <a:lnTo>
+                  <a:pt x="1945178" y="523701"/>
+                </a:lnTo>
+                <a:lnTo>
+                  <a:pt x="1995054" y="498763"/>
+                </a:lnTo>
+                <a:lnTo>
+                  <a:pt x="2044931" y="473825"/>
+                </a:lnTo>
+                <a:lnTo>
+                  <a:pt x="2094807" y="448887"/>
+                </a:lnTo>
+                <a:lnTo>
+                  <a:pt x="2144683" y="423949"/>
+                </a:lnTo>
+                <a:lnTo>
+                  <a:pt x="2194560" y="399010"/>
+                </a:lnTo>
+                <a:lnTo>
+                  <a:pt x="2244436" y="374072"/>
+                </a:lnTo>
+                <a:lnTo>
+                  <a:pt x="2294312" y="349134"/>
+                </a:lnTo>
+                <a:lnTo>
+                  <a:pt x="2344189" y="324196"/>
+                </a:lnTo>
+                <a:lnTo>
+                  <a:pt x="2394065" y="299258"/>
+                </a:lnTo>
+                <a:lnTo>
+                  <a:pt x="2443942" y="274320"/>
+                </a:lnTo>
+                <a:lnTo>
+                  <a:pt x="2493818" y="249381"/>
+                </a:lnTo>
+                <a:lnTo>
+                  <a:pt x="2543694" y="224443"/>
+                </a:lnTo>
+                <a:lnTo>
+                  <a:pt x="2593571" y="199505"/>
+                </a:lnTo>
+                <a:lnTo>
+                  <a:pt x="2643447" y="174567"/>
+                </a:lnTo>
+                <a:lnTo>
+                  <a:pt x="2693323" y="149629"/>
+                </a:lnTo>
+                <a:lnTo>
+                  <a:pt x="2743200" y="124690"/>
+                </a:lnTo>
+                <a:lnTo>
+                  <a:pt x="2793076" y="99752"/>
+                </a:lnTo>
+                <a:lnTo>
+                  <a:pt x="2842952" y="74814"/>
+                </a:lnTo>
+                <a:lnTo>
+                  <a:pt x="2892829" y="49876"/>
+                </a:lnTo>
+                <a:lnTo>
+                  <a:pt x="2942705" y="24938"/>
+                </a:lnTo>
+                <a:lnTo>
+                  <a:pt x="2992582" y="0"/>
+                </a:lnTo>
+              </a:path>
+            </a:pathLst>
+          </a:custGeom>
+          <a:noFill/>
+          <a:ln w="38100">
+            <a:solidFill>
+              <a:srgbClr val="8EDBD4"/>
+            </a:solidFill>
+          </a:ln>
+          <a:effectLst/>
+        </p:spPr>
+        <p:txBody>
+          <a:bodyPr rtlCol="0" anchor="ctr"/>
+          <a:lstStyle/>
+          <a:p>
+            <a:pPr algn="ctr"/>
           </a:p>
         </p:txBody>
       </p:sp>
       <p:cxnSp>
         <p:nvCxnSpPr>
-          <p:cNvPr id="7" name="arrow6" descr="sci-ppt:C1-E31-006"/>
+          <p:cNvPr id="37" name="C1-E31 line 35" descr="sci-ppt:o035"/>
           <p:cNvCxnSpPr/>
           <p:nvPr/>
         </p:nvCxnSpPr>
         <p:spPr>
           <a:xfrm>
-            <a:off x="4937760" y="2414016"/>
-            <a:ext cx="1889760" cy="0"/>
+            <a:off x="6858000" y="3063240"/>
+            <a:ext cx="4937760" cy="0"/>
           </a:xfrm>
           <a:prstGeom prst="line">
             <a:avLst/>
           </a:prstGeom>
-          <a:ln w="25400">
+          <a:ln w="16510">
             <a:solidFill>
-              <a:srgbClr val="8EDBD4"/>
+              <a:srgbClr val="F2B880"/>
             </a:solidFill>
-            <a:headEnd type="none" w="med" len="med"/>
-            <a:tailEnd type="triangle" w="med" len="med"/>
+            <a:prstDash val="dash"/>
           </a:ln>
           <a:effectLst/>
         </p:spPr>
       </p:cxnSp>
       <p:sp>
         <p:nvSpPr>
-          <p:cNvPr id="8" name="text7" descr="sci-ppt:C1-E31-007"/>
+          <p:cNvPr id="38" name="C1-E31 text 36" descr="sci-ppt:o036"/>
           <p:cNvSpPr txBox="1"/>
           <p:nvPr/>
         </p:nvSpPr>
         <p:spPr>
           <a:xfrm>
-            <a:off x="1463040" y="3657600"/>
-            <a:ext cx="9631680" cy="377952"/>
+            <a:off x="7220984" y="2788920"/>
+            <a:ext cx="1097280" cy="231648"/>
           </a:xfrm>
           <a:prstGeom prst="rect">
             <a:avLst/>
@@ -3322,7 +5206,7 @@
           <a:effectLst/>
         </p:spPr>
         <p:txBody>
-          <a:bodyPr wrap="none" lIns="27432" rIns="27432" tIns="18288" bIns="18288" anchor="ctr">
+          <a:bodyPr wrap="none" lIns="18288" rIns="18288" tIns="18288" bIns="18288" anchor="t">
             <a:spAutoFit/>
           </a:bodyPr>
           <a:lstStyle/>
@@ -3333,27 +5217,147 @@
               </a:spcAft>
             </a:pPr>
             <a:r>
-              <a:rPr sz="1920" b="0" i="0">
+              <a:rPr sz="1200" b="0" i="0">
+                <a:solidFill>
+                  <a:srgbClr val="F2B880"/>
+                </a:solidFill>
+                <a:latin typeface="Arial"/>
+              </a:rPr>
+              <a:t>𝒞ₑ = 1</a:t>
+            </a:r>
+          </a:p>
+        </p:txBody>
+      </p:sp>
+      <p:sp>
+        <p:nvSpPr>
+          <p:cNvPr id="39" name="C1-E31 text 37" descr="sci-ppt:o037"/>
+          <p:cNvSpPr txBox="1"/>
+          <p:nvPr/>
+        </p:nvSpPr>
+        <p:spPr>
+          <a:xfrm>
+            <a:off x="9072543" y="1901104"/>
+            <a:ext cx="1645920" cy="231648"/>
+          </a:xfrm>
+          <a:prstGeom prst="rect">
+            <a:avLst/>
+          </a:prstGeom>
+          <a:noFill/>
+          <a:effectLst/>
+        </p:spPr>
+        <p:txBody>
+          <a:bodyPr wrap="none" lIns="18288" rIns="18288" tIns="18288" bIns="18288" anchor="t">
+            <a:spAutoFit/>
+          </a:bodyPr>
+          <a:lstStyle/>
+          <a:p>
+            <a:pPr algn="l">
+              <a:spcAft>
+                <a:spcPts val="0"/>
+              </a:spcAft>
+            </a:pPr>
+            <a:r>
+              <a:rPr sz="1200" b="0" i="0">
+                <a:solidFill>
+                  <a:srgbClr val="F28BA0"/>
+                </a:solidFill>
+                <a:latin typeface="Arial"/>
+              </a:rPr>
+              <a:t>τₑ = 0.1 µs</a:t>
+            </a:r>
+          </a:p>
+        </p:txBody>
+      </p:sp>
+      <p:sp>
+        <p:nvSpPr>
+          <p:cNvPr id="40" name="C1-E31 text 38" descr="sci-ppt:o038"/>
+          <p:cNvSpPr txBox="1"/>
+          <p:nvPr/>
+        </p:nvSpPr>
+        <p:spPr>
+          <a:xfrm>
+            <a:off x="10353317" y="3402108"/>
+            <a:ext cx="1645920" cy="231648"/>
+          </a:xfrm>
+          <a:prstGeom prst="rect">
+            <a:avLst/>
+          </a:prstGeom>
+          <a:noFill/>
+          <a:effectLst/>
+        </p:spPr>
+        <p:txBody>
+          <a:bodyPr wrap="none" lIns="18288" rIns="18288" tIns="18288" bIns="18288" anchor="t">
+            <a:spAutoFit/>
+          </a:bodyPr>
+          <a:lstStyle/>
+          <a:p>
+            <a:pPr algn="l">
+              <a:spcAft>
+                <a:spcPts val="0"/>
+              </a:spcAft>
+            </a:pPr>
+            <a:r>
+              <a:rPr sz="1200" b="0" i="0">
+                <a:solidFill>
+                  <a:srgbClr val="8EDBD4"/>
+                </a:solidFill>
+                <a:latin typeface="Arial"/>
+              </a:rPr>
+              <a:t>τₑ = 10 µs</a:t>
+            </a:r>
+          </a:p>
+        </p:txBody>
+      </p:sp>
+      <p:sp>
+        <p:nvSpPr>
+          <p:cNvPr id="41" name="C1-E31 text 39" descr="sci-ppt:o039"/>
+          <p:cNvSpPr txBox="1"/>
+          <p:nvPr/>
+        </p:nvSpPr>
+        <p:spPr>
+          <a:xfrm>
+            <a:off x="6858000" y="5212080"/>
+            <a:ext cx="4937760" cy="239395"/>
+          </a:xfrm>
+          <a:prstGeom prst="rect">
+            <a:avLst/>
+          </a:prstGeom>
+          <a:noFill/>
+          <a:effectLst/>
+        </p:spPr>
+        <p:txBody>
+          <a:bodyPr wrap="none" lIns="18288" rIns="18288" tIns="18288" bIns="18288" anchor="t">
+            <a:spAutoFit/>
+          </a:bodyPr>
+          <a:lstStyle/>
+          <a:p>
+            <a:pPr algn="l">
+              <a:spcAft>
+                <a:spcPts val="0"/>
+              </a:spcAft>
+            </a:pPr>
+            <a:r>
+              <a:rPr sz="1250" b="1" i="0">
                 <a:solidFill>
                   <a:srgbClr val="E7F0F3"/>
                 </a:solidFill>
                 <a:latin typeface="Arial"/>
               </a:rPr>
-              <a:t>Check both motion and pressure communication.</a:t>
-            </a:r>
-          </a:p>
-        </p:txBody>
-      </p:sp>
-      <p:sp>
-        <p:nvSpPr>
-          <p:cNvPr id="9" name="text8" descr="sci-ppt:C1-E31-008"/>
+              <a:t>M_w = |Ṙ|/c  and  𝒞ₑ = Lₑ/(cτₑ)  test different things.</a:t>
+            </a:r>
+          </a:p>
+        </p:txBody>
+      </p:sp>
+      <p:sp>
+        <p:nvSpPr>
+          <p:cNvPr id="42" name="C1-E31 text 40" descr="sci-ppt:o040"/>
           <p:cNvSpPr txBox="1"/>
           <p:nvPr/>
         </p:nvSpPr>
         <p:spPr>
           <a:xfrm>
-            <a:off x="365760" y="4974336"/>
-            <a:ext cx="5547360" cy="321259"/>
+            <a:off x="457200" y="5669280"/>
+            <a:ext cx="11338560" cy="247142"/>
           </a:xfrm>
           <a:prstGeom prst="rect">
             <a:avLst/>
@@ -3362,7 +5366,7 @@
           <a:effectLst/>
         </p:spPr>
         <p:txBody>
-          <a:bodyPr wrap="none" lIns="27432" rIns="27432" tIns="18288" bIns="18288" anchor="ctr">
+          <a:bodyPr wrap="none" lIns="18288" rIns="18288" tIns="18288" bIns="18288" anchor="t">
             <a:spAutoFit/>
           </a:bodyPr>
           <a:lstStyle/>
@@ -3373,27 +5377,27 @@
               </a:spcAft>
             </a:pPr>
             <a:r>
-              <a:rPr sz="1632" b="0" i="0">
+              <a:rPr sz="1300" b="0" i="0">
                 <a:solidFill>
-                  <a:srgbClr val="E7F0F3"/>
+                  <a:srgbClr val="F2B880"/>
                 </a:solidFill>
                 <a:latin typeface="Arial"/>
               </a:rPr>
-              <a:t>Mw = |Ṙ|/c</a:t>
-            </a:r>
-          </a:p>
-        </p:txBody>
-      </p:sp>
-      <p:sp>
-        <p:nvSpPr>
-          <p:cNvPr id="10" name="text9" descr="sci-ppt:C1-E31-009"/>
+              <a:t>A pulse can need compressibility even when the wall is slow: 𝒞ₑ ≳ 1 means pressure cannot equalise during the rise.</a:t>
+            </a:r>
+          </a:p>
+        </p:txBody>
+      </p:sp>
+      <p:sp>
+        <p:nvSpPr>
+          <p:cNvPr id="43" name="C1-E31 text 41" descr="sci-ppt:o041"/>
           <p:cNvSpPr txBox="1"/>
           <p:nvPr/>
         </p:nvSpPr>
         <p:spPr>
           <a:xfrm>
-            <a:off x="365760" y="5266944"/>
-            <a:ext cx="5547360" cy="321259"/>
+            <a:off x="320040" y="6510528"/>
+            <a:ext cx="11521440" cy="200660"/>
           </a:xfrm>
           <a:prstGeom prst="rect">
             <a:avLst/>
@@ -3402,7 +5406,7 @@
           <a:effectLst/>
         </p:spPr>
         <p:txBody>
-          <a:bodyPr wrap="none" lIns="27432" rIns="27432" tIns="18288" bIns="18288" anchor="ctr">
+          <a:bodyPr wrap="none" lIns="18288" rIns="18288" tIns="18288" bIns="18288" anchor="t">
             <a:spAutoFit/>
           </a:bodyPr>
           <a:lstStyle/>
@@ -3413,293 +5417,13 @@
               </a:spcAft>
             </a:pPr>
             <a:r>
-              <a:rPr sz="1632" b="0" i="0">
-                <a:solidFill>
-                  <a:srgbClr val="E7F0F3"/>
-                </a:solidFill>
-                <a:latin typeface="Arial"/>
-              </a:rPr>
-              <a:t>Ṙ</a:t>
-            </a:r>
-          </a:p>
-        </p:txBody>
-      </p:sp>
-      <p:sp>
-        <p:nvSpPr>
-          <p:cNvPr id="11" name="text10" descr="sci-ppt:C1-E31-010"/>
-          <p:cNvSpPr txBox="1"/>
-          <p:nvPr/>
-        </p:nvSpPr>
-        <p:spPr>
-          <a:xfrm>
-            <a:off x="365760" y="5559552"/>
-            <a:ext cx="5547360" cy="321259"/>
-          </a:xfrm>
-          <a:prstGeom prst="rect">
-            <a:avLst/>
-          </a:prstGeom>
-          <a:noFill/>
-          <a:effectLst/>
-        </p:spPr>
-        <p:txBody>
-          <a:bodyPr wrap="none" lIns="27432" rIns="27432" tIns="18288" bIns="18288" anchor="ctr">
-            <a:spAutoFit/>
-          </a:bodyPr>
-          <a:lstStyle/>
-          <a:p>
-            <a:pPr algn="l">
-              <a:spcAft>
-                <a:spcPts val="0"/>
-              </a:spcAft>
-            </a:pPr>
-            <a:r>
-              <a:rPr sz="1632" b="0" i="0">
-                <a:solidFill>
-                  <a:srgbClr val="E7F0F3"/>
-                </a:solidFill>
-                <a:latin typeface="Arial"/>
-              </a:rPr>
-              <a:t>Le</a:t>
-            </a:r>
-          </a:p>
-        </p:txBody>
-      </p:sp>
-      <p:sp>
-        <p:nvSpPr>
-          <p:cNvPr id="12" name="text11" descr="sci-ppt:C1-E31-011"/>
-          <p:cNvSpPr txBox="1"/>
-          <p:nvPr/>
-        </p:nvSpPr>
-        <p:spPr>
-          <a:xfrm>
-            <a:off x="365760" y="5852160"/>
-            <a:ext cx="5547360" cy="321259"/>
-          </a:xfrm>
-          <a:prstGeom prst="rect">
-            <a:avLst/>
-          </a:prstGeom>
-          <a:noFill/>
-          <a:effectLst/>
-        </p:spPr>
-        <p:txBody>
-          <a:bodyPr wrap="none" lIns="27432" rIns="27432" tIns="18288" bIns="18288" anchor="ctr">
-            <a:spAutoFit/>
-          </a:bodyPr>
-          <a:lstStyle/>
-          <a:p>
-            <a:pPr algn="l">
-              <a:spcAft>
-                <a:spcPts val="0"/>
-              </a:spcAft>
-            </a:pPr>
-            <a:r>
-              <a:rPr sz="1632" b="0" i="0">
-                <a:solidFill>
-                  <a:srgbClr val="E7F0F3"/>
-                </a:solidFill>
-                <a:latin typeface="Arial"/>
-              </a:rPr>
-              <a:t>Pressure propagation path</a:t>
-            </a:r>
-          </a:p>
-        </p:txBody>
-      </p:sp>
-      <p:sp>
-        <p:nvSpPr>
-          <p:cNvPr id="13" name="text12" descr="sci-ppt:C1-E31-012"/>
-          <p:cNvSpPr txBox="1"/>
-          <p:nvPr/>
-        </p:nvSpPr>
-        <p:spPr>
-          <a:xfrm>
-            <a:off x="6156960" y="4974336"/>
-            <a:ext cx="5547360" cy="321259"/>
-          </a:xfrm>
-          <a:prstGeom prst="rect">
-            <a:avLst/>
-          </a:prstGeom>
-          <a:noFill/>
-          <a:effectLst/>
-        </p:spPr>
-        <p:txBody>
-          <a:bodyPr wrap="none" lIns="27432" rIns="27432" tIns="18288" bIns="18288" anchor="ctr">
-            <a:spAutoFit/>
-          </a:bodyPr>
-          <a:lstStyle/>
-          <a:p>
-            <a:pPr algn="l">
-              <a:spcAft>
-                <a:spcPts val="0"/>
-              </a:spcAft>
-            </a:pPr>
-            <a:r>
-              <a:rPr sz="1632" b="0" i="0">
-                <a:solidFill>
-                  <a:srgbClr val="E7F0F3"/>
-                </a:solidFill>
-                <a:latin typeface="Arial"/>
-              </a:rPr>
-              <a:t>Ce = Le/(cτe)</a:t>
-            </a:r>
-          </a:p>
-        </p:txBody>
-      </p:sp>
-      <p:sp>
-        <p:nvSpPr>
-          <p:cNvPr id="14" name="text13" descr="sci-ppt:C1-E31-013"/>
-          <p:cNvSpPr txBox="1"/>
-          <p:nvPr/>
-        </p:nvSpPr>
-        <p:spPr>
-          <a:xfrm>
-            <a:off x="6156960" y="5266944"/>
-            <a:ext cx="5547360" cy="321259"/>
-          </a:xfrm>
-          <a:prstGeom prst="rect">
-            <a:avLst/>
-          </a:prstGeom>
-          <a:noFill/>
-          <a:effectLst/>
-        </p:spPr>
-        <p:txBody>
-          <a:bodyPr wrap="none" lIns="27432" rIns="27432" tIns="18288" bIns="18288" anchor="ctr">
-            <a:spAutoFit/>
-          </a:bodyPr>
-          <a:lstStyle/>
-          <a:p>
-            <a:pPr algn="l">
-              <a:spcAft>
-                <a:spcPts val="0"/>
-              </a:spcAft>
-            </a:pPr>
-            <a:r>
-              <a:rPr sz="1632" b="0" i="0">
-                <a:solidFill>
-                  <a:srgbClr val="E7F0F3"/>
-                </a:solidFill>
-                <a:latin typeface="Arial"/>
-              </a:rPr>
-              <a:t>c</a:t>
-            </a:r>
-          </a:p>
-        </p:txBody>
-      </p:sp>
-      <p:sp>
-        <p:nvSpPr>
-          <p:cNvPr id="15" name="text14" descr="sci-ppt:C1-E31-014"/>
-          <p:cNvSpPr txBox="1"/>
-          <p:nvPr/>
-        </p:nvSpPr>
-        <p:spPr>
-          <a:xfrm>
-            <a:off x="6156960" y="5559552"/>
-            <a:ext cx="5547360" cy="321259"/>
-          </a:xfrm>
-          <a:prstGeom prst="rect">
-            <a:avLst/>
-          </a:prstGeom>
-          <a:noFill/>
-          <a:effectLst/>
-        </p:spPr>
-        <p:txBody>
-          <a:bodyPr wrap="none" lIns="27432" rIns="27432" tIns="18288" bIns="18288" anchor="ctr">
-            <a:spAutoFit/>
-          </a:bodyPr>
-          <a:lstStyle/>
-          <a:p>
-            <a:pPr algn="l">
-              <a:spcAft>
-                <a:spcPts val="0"/>
-              </a:spcAft>
-            </a:pPr>
-            <a:r>
-              <a:rPr sz="1632" b="0" i="0">
-                <a:solidFill>
-                  <a:srgbClr val="E7F0F3"/>
-                </a:solidFill>
-                <a:latin typeface="Arial"/>
-              </a:rPr>
-              <a:t>τe</a:t>
-            </a:r>
-          </a:p>
-        </p:txBody>
-      </p:sp>
-      <p:sp>
-        <p:nvSpPr>
-          <p:cNvPr id="16" name="text15" descr="sci-ppt:C1-E31-015"/>
-          <p:cNvSpPr txBox="1"/>
-          <p:nvPr/>
-        </p:nvSpPr>
-        <p:spPr>
-          <a:xfrm>
-            <a:off x="365760" y="6339840"/>
-            <a:ext cx="11277600" cy="302361"/>
-          </a:xfrm>
-          <a:prstGeom prst="rect">
-            <a:avLst/>
-          </a:prstGeom>
-          <a:noFill/>
-          <a:effectLst/>
-        </p:spPr>
-        <p:txBody>
-          <a:bodyPr wrap="none" lIns="27432" rIns="27432" tIns="18288" bIns="18288" anchor="ctr">
-            <a:spAutoFit/>
-          </a:bodyPr>
-          <a:lstStyle/>
-          <a:p>
-            <a:pPr algn="l">
-              <a:spcAft>
-                <a:spcPts val="0"/>
-              </a:spcAft>
-            </a:pPr>
-            <a:r>
-              <a:rPr sz="1536" b="0" i="0">
+              <a:rPr sz="1000" b="0" i="0">
                 <a:solidFill>
                   <a:srgbClr val="B4C7D2"/>
                 </a:solidFill>
                 <a:latin typeface="Arial"/>
               </a:rPr>
-              <a:t>Small wall Mach alone does not ensure fast pressure communication</a:t>
-            </a:r>
-          </a:p>
-        </p:txBody>
-      </p:sp>
-      <p:sp>
-        <p:nvSpPr>
-          <p:cNvPr id="17" name="text16" descr="sci-ppt:C1-E31-016"/>
-          <p:cNvSpPr txBox="1"/>
-          <p:nvPr/>
-        </p:nvSpPr>
-        <p:spPr>
-          <a:xfrm>
-            <a:off x="365760" y="6632448"/>
-            <a:ext cx="11277600" cy="302361"/>
-          </a:xfrm>
-          <a:prstGeom prst="rect">
-            <a:avLst/>
-          </a:prstGeom>
-          <a:noFill/>
-          <a:effectLst/>
-        </p:spPr>
-        <p:txBody>
-          <a:bodyPr wrap="none" lIns="27432" rIns="27432" tIns="18288" bIns="18288" anchor="ctr">
-            <a:spAutoFit/>
-          </a:bodyPr>
-          <a:lstStyle/>
-          <a:p>
-            <a:pPr algn="l">
-              <a:spcAft>
-                <a:spcPts val="0"/>
-              </a:spcAft>
-            </a:pPr>
-            <a:r>
-              <a:rPr sz="1536" b="0" i="0">
-                <a:solidFill>
-                  <a:srgbClr val="B4C7D2"/>
-                </a:solidFill>
-                <a:latin typeface="Arial"/>
-              </a:rPr>
-              <a:t>An impact rise time can be much shorter than the total collapse time</a:t>
+              <a:t>c = 1500 m/s; curves from the definition 𝒞ₑ = Lₑ/(c τₑ) of Eq. C1-E31.</a:t>
             </a:r>
           </a:p>
         </p:txBody>

--- a/assets/figures-editable/c1-c2/c1-e31.pptx
+++ b/assets/figures-editable/c1-c2/c1-e31.pptx
@@ -3131,21 +3131,53 @@
                 </a:solidFill>
                 <a:latin typeface="Arial"/>
               </a:rPr>
-              <a:t>C1-E31 · Compressibility applicability diagnostics</a:t>
-            </a:r>
-          </a:p>
-        </p:txBody>
-      </p:sp>
-      <p:sp>
-        <p:nvSpPr>
-          <p:cNvPr id="3" name="C1-E31 text 1" descr="sci-ppt:o001"/>
+              <a:t>C1-E31 · Original formulas quoted for defense 1</a:t>
+            </a:r>
+          </a:p>
+        </p:txBody>
+      </p:sp>
+      <p:sp>
+        <p:nvSpPr>
+          <p:cNvPr id="3" name="C1-E31 round_rect 1" descr="sci-ppt:o001"/>
+          <p:cNvSpPr/>
+          <p:nvPr/>
+        </p:nvSpPr>
+        <p:spPr>
+          <a:xfrm>
+            <a:off x="457200" y="1280160"/>
+            <a:ext cx="2503170" cy="1554480"/>
+          </a:xfrm>
+          <a:prstGeom prst="roundRect">
+            <a:avLst/>
+          </a:prstGeom>
+          <a:solidFill>
+            <a:srgbClr val="213E4B"/>
+          </a:solidFill>
+          <a:ln w="20320">
+            <a:solidFill>
+              <a:srgbClr val="F2B880"/>
+            </a:solidFill>
+          </a:ln>
+          <a:effectLst/>
+        </p:spPr>
+        <p:txBody>
+          <a:bodyPr rtlCol="0" anchor="ctr"/>
+          <a:lstStyle/>
+          <a:p>
+            <a:pPr algn="ctr"/>
+          </a:p>
+        </p:txBody>
+      </p:sp>
+      <p:sp>
+        <p:nvSpPr>
+          <p:cNvPr id="4" name="C1-E31 text 2" descr="sci-ppt:o002"/>
           <p:cNvSpPr txBox="1"/>
           <p:nvPr/>
         </p:nvSpPr>
         <p:spPr>
           <a:xfrm>
-            <a:off x="457200" y="914400"/>
-            <a:ext cx="5669280" cy="262636"/>
+            <a:off x="530352" y="1335024"/>
+            <a:ext cx="2356866" cy="254889"/>
           </a:xfrm>
           <a:prstGeom prst="rect">
             <a:avLst/>
@@ -3159,65 +3191,633 @@
           </a:bodyPr>
           <a:lstStyle/>
           <a:p>
+            <a:pPr algn="ctr">
+              <a:spcAft>
+                <a:spcPts val="0"/>
+              </a:spcAft>
+            </a:pPr>
+            <a:r>
+              <a:rPr sz="1350" b="1" i="0">
+                <a:solidFill>
+                  <a:srgbClr val="F2B880"/>
+                </a:solidFill>
+                <a:latin typeface="Arial"/>
+              </a:rPr>
+              <a:t>Source pressure</a:t>
+            </a:r>
+          </a:p>
+        </p:txBody>
+      </p:sp>
+      <p:sp>
+        <p:nvSpPr>
+          <p:cNvPr id="5" name="C1-E31 text 3" descr="sci-ppt:o003"/>
+          <p:cNvSpPr txBox="1"/>
+          <p:nvPr/>
+        </p:nvSpPr>
+        <p:spPr>
+          <a:xfrm>
+            <a:off x="530352" y="1608201"/>
+            <a:ext cx="2356866" cy="433070"/>
+          </a:xfrm>
+          <a:prstGeom prst="rect">
+            <a:avLst/>
+          </a:prstGeom>
+          <a:noFill/>
+          <a:effectLst/>
+        </p:spPr>
+        <p:txBody>
+          <a:bodyPr wrap="none" lIns="18288" rIns="18288" tIns="18288" bIns="18288" anchor="t">
+            <a:spAutoFit/>
+          </a:bodyPr>
+          <a:lstStyle/>
+          <a:p>
+            <a:pPr algn="ctr">
+              <a:spcAft>
+                <a:spcPts val="0"/>
+              </a:spcAft>
+            </a:pPr>
+            <a:r>
+              <a:rPr sz="1250" b="0" i="0">
+                <a:solidFill>
+                  <a:srgbClr val="E7F0F3"/>
+                </a:solidFill>
+                <a:latin typeface="Arial"/>
+              </a:rPr>
+              <a:t>p_b from the contents (E08),</a:t>
+            </a:r>
+          </a:p>
+          <a:p>
+            <a:pPr algn="ctr">
+              <a:spcAft>
+                <a:spcPts val="0"/>
+              </a:spcAft>
+            </a:pPr>
+            <a:r>
+              <a:rPr sz="1250" b="0" i="0">
+                <a:solidFill>
+                  <a:srgbClr val="E7F0F3"/>
+                </a:solidFill>
+                <a:latin typeface="Arial"/>
+              </a:rPr>
+              <a:t>not from R alone</a:t>
+            </a:r>
+          </a:p>
+        </p:txBody>
+      </p:sp>
+      <p:cxnSp>
+        <p:nvCxnSpPr>
+          <p:cNvPr id="6" name="C1-E31 arrow 4" descr="sci-ppt:o004"/>
+          <p:cNvCxnSpPr/>
+          <p:nvPr/>
+        </p:nvCxnSpPr>
+        <p:spPr>
+          <a:xfrm>
+            <a:off x="2987802" y="2057400"/>
+            <a:ext cx="356616" cy="0"/>
+          </a:xfrm>
+          <a:prstGeom prst="line">
+            <a:avLst/>
+          </a:prstGeom>
+          <a:ln w="27940">
+            <a:solidFill>
+              <a:srgbClr val="B4C7D2"/>
+            </a:solidFill>
+            <a:headEnd type="none" w="med" len="med"/>
+            <a:tailEnd type="triangle" w="med" len="med"/>
+          </a:ln>
+          <a:effectLst/>
+        </p:spPr>
+      </p:cxnSp>
+      <p:sp>
+        <p:nvSpPr>
+          <p:cNvPr id="7" name="C1-E31 round_rect 5" descr="sci-ppt:o005"/>
+          <p:cNvSpPr/>
+          <p:nvPr/>
+        </p:nvSpPr>
+        <p:spPr>
+          <a:xfrm>
+            <a:off x="3371850" y="1280160"/>
+            <a:ext cx="2503170" cy="1554480"/>
+          </a:xfrm>
+          <a:prstGeom prst="roundRect">
+            <a:avLst/>
+          </a:prstGeom>
+          <a:solidFill>
+            <a:srgbClr val="213E4B"/>
+          </a:solidFill>
+          <a:ln w="20320">
+            <a:solidFill>
+              <a:srgbClr val="8EDBD4"/>
+            </a:solidFill>
+          </a:ln>
+          <a:effectLst/>
+        </p:spPr>
+        <p:txBody>
+          <a:bodyPr rtlCol="0" anchor="ctr"/>
+          <a:lstStyle/>
+          <a:p>
+            <a:pPr algn="ctr"/>
+          </a:p>
+        </p:txBody>
+      </p:sp>
+      <p:sp>
+        <p:nvSpPr>
+          <p:cNvPr id="8" name="C1-E31 text 6" descr="sci-ppt:o006"/>
+          <p:cNvSpPr txBox="1"/>
+          <p:nvPr/>
+        </p:nvSpPr>
+        <p:spPr>
+          <a:xfrm>
+            <a:off x="3445002" y="1335024"/>
+            <a:ext cx="2356866" cy="254889"/>
+          </a:xfrm>
+          <a:prstGeom prst="rect">
+            <a:avLst/>
+          </a:prstGeom>
+          <a:noFill/>
+          <a:effectLst/>
+        </p:spPr>
+        <p:txBody>
+          <a:bodyPr wrap="none" lIns="18288" rIns="18288" tIns="18288" bIns="18288" anchor="t">
+            <a:spAutoFit/>
+          </a:bodyPr>
+          <a:lstStyle/>
+          <a:p>
+            <a:pPr algn="ctr">
+              <a:spcAft>
+                <a:spcPts val="0"/>
+              </a:spcAft>
+            </a:pPr>
+            <a:r>
+              <a:rPr sz="1350" b="1" i="0">
+                <a:solidFill>
+                  <a:srgbClr val="8EDBD4"/>
+                </a:solidFill>
+                <a:latin typeface="Arial"/>
+              </a:rPr>
+              <a:t>Radius motion</a:t>
+            </a:r>
+          </a:p>
+        </p:txBody>
+      </p:sp>
+      <p:sp>
+        <p:nvSpPr>
+          <p:cNvPr id="9" name="C1-E31 text 7" descr="sci-ppt:o007"/>
+          <p:cNvSpPr txBox="1"/>
+          <p:nvPr/>
+        </p:nvSpPr>
+        <p:spPr>
+          <a:xfrm>
+            <a:off x="3445002" y="1608201"/>
+            <a:ext cx="2356866" cy="433070"/>
+          </a:xfrm>
+          <a:prstGeom prst="rect">
+            <a:avLst/>
+          </a:prstGeom>
+          <a:noFill/>
+          <a:effectLst/>
+        </p:spPr>
+        <p:txBody>
+          <a:bodyPr wrap="none" lIns="18288" rIns="18288" tIns="18288" bIns="18288" anchor="t">
+            <a:spAutoFit/>
+          </a:bodyPr>
+          <a:lstStyle/>
+          <a:p>
+            <a:pPr algn="ctr">
+              <a:spcAft>
+                <a:spcPts val="0"/>
+              </a:spcAft>
+            </a:pPr>
+            <a:r>
+              <a:rPr sz="1250" b="0" i="0">
+                <a:solidFill>
+                  <a:srgbClr val="E7F0F3"/>
+                </a:solidFill>
+                <a:latin typeface="Arial"/>
+              </a:rPr>
+              <a:t>Rayleigh–Plesset: p_b − p∞ −</a:t>
+            </a:r>
+          </a:p>
+          <a:p>
+            <a:pPr algn="ctr">
+              <a:spcAft>
+                <a:spcPts val="0"/>
+              </a:spcAft>
+            </a:pPr>
+            <a:r>
+              <a:rPr sz="1250" b="0" i="0">
+                <a:solidFill>
+                  <a:srgbClr val="E7F0F3"/>
+                </a:solidFill>
+                <a:latin typeface="Arial"/>
+              </a:rPr>
+              <a:t>2σ/R − 4μṘ/R (E07)</a:t>
+            </a:r>
+          </a:p>
+        </p:txBody>
+      </p:sp>
+      <p:cxnSp>
+        <p:nvCxnSpPr>
+          <p:cNvPr id="10" name="C1-E31 arrow 8" descr="sci-ppt:o008"/>
+          <p:cNvCxnSpPr/>
+          <p:nvPr/>
+        </p:nvCxnSpPr>
+        <p:spPr>
+          <a:xfrm>
+            <a:off x="5902452" y="2057400"/>
+            <a:ext cx="356616" cy="0"/>
+          </a:xfrm>
+          <a:prstGeom prst="line">
+            <a:avLst/>
+          </a:prstGeom>
+          <a:ln w="27940">
+            <a:solidFill>
+              <a:srgbClr val="B4C7D2"/>
+            </a:solidFill>
+            <a:headEnd type="none" w="med" len="med"/>
+            <a:tailEnd type="triangle" w="med" len="med"/>
+          </a:ln>
+          <a:effectLst/>
+        </p:spPr>
+      </p:cxnSp>
+      <p:sp>
+        <p:nvSpPr>
+          <p:cNvPr id="11" name="C1-E31 round_rect 9" descr="sci-ppt:o009"/>
+          <p:cNvSpPr/>
+          <p:nvPr/>
+        </p:nvSpPr>
+        <p:spPr>
+          <a:xfrm>
+            <a:off x="6286500" y="1280160"/>
+            <a:ext cx="2503170" cy="1554480"/>
+          </a:xfrm>
+          <a:prstGeom prst="roundRect">
+            <a:avLst/>
+          </a:prstGeom>
+          <a:solidFill>
+            <a:srgbClr val="213E4B"/>
+          </a:solidFill>
+          <a:ln w="20320">
+            <a:solidFill>
+              <a:srgbClr val="7FC8F8"/>
+            </a:solidFill>
+          </a:ln>
+          <a:effectLst/>
+        </p:spPr>
+        <p:txBody>
+          <a:bodyPr rtlCol="0" anchor="ctr"/>
+          <a:lstStyle/>
+          <a:p>
+            <a:pPr algn="ctr"/>
+          </a:p>
+        </p:txBody>
+      </p:sp>
+      <p:sp>
+        <p:nvSpPr>
+          <p:cNvPr id="12" name="C1-E31 text 10" descr="sci-ppt:o010"/>
+          <p:cNvSpPr txBox="1"/>
+          <p:nvPr/>
+        </p:nvSpPr>
+        <p:spPr>
+          <a:xfrm>
+            <a:off x="6359652" y="1335024"/>
+            <a:ext cx="2356866" cy="254889"/>
+          </a:xfrm>
+          <a:prstGeom prst="rect">
+            <a:avLst/>
+          </a:prstGeom>
+          <a:noFill/>
+          <a:effectLst/>
+        </p:spPr>
+        <p:txBody>
+          <a:bodyPr wrap="none" lIns="18288" rIns="18288" tIns="18288" bIns="18288" anchor="t">
+            <a:spAutoFit/>
+          </a:bodyPr>
+          <a:lstStyle/>
+          <a:p>
+            <a:pPr algn="ctr">
+              <a:spcAft>
+                <a:spcPts val="0"/>
+              </a:spcAft>
+            </a:pPr>
+            <a:r>
+              <a:rPr sz="1350" b="1" i="0">
+                <a:solidFill>
+                  <a:srgbClr val="7FC8F8"/>
+                </a:solidFill>
+                <a:latin typeface="Arial"/>
+              </a:rPr>
+              <a:t>Liquid response</a:t>
+            </a:r>
+          </a:p>
+        </p:txBody>
+      </p:sp>
+      <p:sp>
+        <p:nvSpPr>
+          <p:cNvPr id="13" name="C1-E31 text 11" descr="sci-ppt:o011"/>
+          <p:cNvSpPr txBox="1"/>
+          <p:nvPr/>
+        </p:nvSpPr>
+        <p:spPr>
+          <a:xfrm>
+            <a:off x="6359652" y="1608201"/>
+            <a:ext cx="2356866" cy="626745"/>
+          </a:xfrm>
+          <a:prstGeom prst="rect">
+            <a:avLst/>
+          </a:prstGeom>
+          <a:noFill/>
+          <a:effectLst/>
+        </p:spPr>
+        <p:txBody>
+          <a:bodyPr wrap="none" lIns="18288" rIns="18288" tIns="18288" bIns="18288" anchor="t">
+            <a:spAutoFit/>
+          </a:bodyPr>
+          <a:lstStyle/>
+          <a:p>
+            <a:pPr algn="ctr">
+              <a:spcAft>
+                <a:spcPts val="0"/>
+              </a:spcAft>
+            </a:pPr>
+            <a:r>
+              <a:rPr sz="1250" b="0" i="0">
+                <a:solidFill>
+                  <a:srgbClr val="E7F0F3"/>
+                </a:solidFill>
+                <a:latin typeface="Arial"/>
+              </a:rPr>
+              <a:t>inertia stores the work;</a:t>
+            </a:r>
+          </a:p>
+          <a:p>
+            <a:pPr algn="ctr">
+              <a:spcAft>
+                <a:spcPts val="0"/>
+              </a:spcAft>
+            </a:pPr>
+            <a:r>
+              <a:rPr sz="1250" b="0" i="0">
+                <a:solidFill>
+                  <a:srgbClr val="E7F0F3"/>
+                </a:solidFill>
+                <a:latin typeface="Arial"/>
+              </a:rPr>
+              <a:t>impulse Π gives early speed</a:t>
+            </a:r>
+          </a:p>
+          <a:p>
+            <a:pPr algn="ctr">
+              <a:spcAft>
+                <a:spcPts val="0"/>
+              </a:spcAft>
+            </a:pPr>
+            <a:r>
+              <a:rPr sz="1250" b="0" i="0">
+                <a:solidFill>
+                  <a:srgbClr val="E7F0F3"/>
+                </a:solidFill>
+                <a:latin typeface="Arial"/>
+              </a:rPr>
+              <a:t>(E05, E21)</a:t>
+            </a:r>
+          </a:p>
+        </p:txBody>
+      </p:sp>
+      <p:cxnSp>
+        <p:nvCxnSpPr>
+          <p:cNvPr id="14" name="C1-E31 arrow 12" descr="sci-ppt:o012"/>
+          <p:cNvCxnSpPr/>
+          <p:nvPr/>
+        </p:nvCxnSpPr>
+        <p:spPr>
+          <a:xfrm>
+            <a:off x="8817102" y="2057400"/>
+            <a:ext cx="356616" cy="0"/>
+          </a:xfrm>
+          <a:prstGeom prst="line">
+            <a:avLst/>
+          </a:prstGeom>
+          <a:ln w="27940">
+            <a:solidFill>
+              <a:srgbClr val="B4C7D2"/>
+            </a:solidFill>
+            <a:headEnd type="none" w="med" len="med"/>
+            <a:tailEnd type="triangle" w="med" len="med"/>
+          </a:ln>
+          <a:effectLst/>
+        </p:spPr>
+      </p:cxnSp>
+      <p:sp>
+        <p:nvSpPr>
+          <p:cNvPr id="15" name="C1-E31 round_rect 13" descr="sci-ppt:o013"/>
+          <p:cNvSpPr/>
+          <p:nvPr/>
+        </p:nvSpPr>
+        <p:spPr>
+          <a:xfrm>
+            <a:off x="9201150" y="1280160"/>
+            <a:ext cx="2503170" cy="1554480"/>
+          </a:xfrm>
+          <a:prstGeom prst="roundRect">
+            <a:avLst/>
+          </a:prstGeom>
+          <a:solidFill>
+            <a:srgbClr val="213E4B"/>
+          </a:solidFill>
+          <a:ln w="20320">
+            <a:solidFill>
+              <a:srgbClr val="F28BA0"/>
+            </a:solidFill>
+          </a:ln>
+          <a:effectLst/>
+        </p:spPr>
+        <p:txBody>
+          <a:bodyPr rtlCol="0" anchor="ctr"/>
+          <a:lstStyle/>
+          <a:p>
+            <a:pPr algn="ctr"/>
+          </a:p>
+        </p:txBody>
+      </p:sp>
+      <p:sp>
+        <p:nvSpPr>
+          <p:cNvPr id="16" name="C1-E31 text 14" descr="sci-ppt:o014"/>
+          <p:cNvSpPr txBox="1"/>
+          <p:nvPr/>
+        </p:nvSpPr>
+        <p:spPr>
+          <a:xfrm>
+            <a:off x="9274302" y="1335024"/>
+            <a:ext cx="2356866" cy="254889"/>
+          </a:xfrm>
+          <a:prstGeom prst="rect">
+            <a:avLst/>
+          </a:prstGeom>
+          <a:noFill/>
+          <a:effectLst/>
+        </p:spPr>
+        <p:txBody>
+          <a:bodyPr wrap="none" lIns="18288" rIns="18288" tIns="18288" bIns="18288" anchor="t">
+            <a:spAutoFit/>
+          </a:bodyPr>
+          <a:lstStyle/>
+          <a:p>
+            <a:pPr algn="ctr">
+              <a:spcAft>
+                <a:spcPts val="0"/>
+              </a:spcAft>
+            </a:pPr>
+            <a:r>
+              <a:rPr sz="1350" b="1" i="0">
+                <a:solidFill>
+                  <a:srgbClr val="F28BA0"/>
+                </a:solidFill>
+                <a:latin typeface="Arial"/>
+              </a:rPr>
+              <a:t>Geometry</a:t>
+            </a:r>
+          </a:p>
+        </p:txBody>
+      </p:sp>
+      <p:sp>
+        <p:nvSpPr>
+          <p:cNvPr id="17" name="C1-E31 text 15" descr="sci-ppt:o015"/>
+          <p:cNvSpPr txBox="1"/>
+          <p:nvPr/>
+        </p:nvSpPr>
+        <p:spPr>
+          <a:xfrm>
+            <a:off x="9274302" y="1608201"/>
+            <a:ext cx="2356866" cy="433070"/>
+          </a:xfrm>
+          <a:prstGeom prst="rect">
+            <a:avLst/>
+          </a:prstGeom>
+          <a:noFill/>
+          <a:effectLst/>
+        </p:spPr>
+        <p:txBody>
+          <a:bodyPr wrap="none" lIns="18288" rIns="18288" tIns="18288" bIns="18288" anchor="t">
+            <a:spAutoFit/>
+          </a:bodyPr>
+          <a:lstStyle/>
+          <a:p>
+            <a:pPr algn="ctr">
+              <a:spcAft>
+                <a:spcPts val="0"/>
+              </a:spcAft>
+            </a:pPr>
+            <a:r>
+              <a:rPr sz="1250" b="0" i="0">
+                <a:solidFill>
+                  <a:srgbClr val="E7F0F3"/>
+                </a:solidFill>
+                <a:latin typeface="Arial"/>
+              </a:rPr>
+              <a:t>stand-off and walls decide</a:t>
+            </a:r>
+          </a:p>
+          <a:p>
+            <a:pPr algn="ctr">
+              <a:spcAft>
+                <a:spcPts val="0"/>
+              </a:spcAft>
+            </a:pPr>
+            <a:r>
+              <a:rPr sz="1250" b="0" i="0">
+                <a:solidFill>
+                  <a:srgbClr val="E7F0F3"/>
+                </a:solidFill>
+                <a:latin typeface="Arial"/>
+              </a:rPr>
+              <a:t>direction (E26–E29)</a:t>
+            </a:r>
+          </a:p>
+        </p:txBody>
+      </p:sp>
+      <p:sp>
+        <p:nvSpPr>
+          <p:cNvPr id="18" name="C1-E31 round_rect 16" descr="sci-ppt:o016"/>
+          <p:cNvSpPr/>
+          <p:nvPr/>
+        </p:nvSpPr>
+        <p:spPr>
+          <a:xfrm>
+            <a:off x="457200" y="3200400"/>
+            <a:ext cx="11247120" cy="1417320"/>
+          </a:xfrm>
+          <a:prstGeom prst="roundRect">
+            <a:avLst/>
+          </a:prstGeom>
+          <a:solidFill>
+            <a:srgbClr val="213E4B"/>
+          </a:solidFill>
+          <a:ln w="20320">
+            <a:solidFill>
+              <a:srgbClr val="B4C7D2"/>
+            </a:solidFill>
+          </a:ln>
+          <a:effectLst/>
+        </p:spPr>
+        <p:txBody>
+          <a:bodyPr rtlCol="0" anchor="ctr"/>
+          <a:lstStyle/>
+          <a:p>
+            <a:pPr algn="ctr"/>
+          </a:p>
+        </p:txBody>
+      </p:sp>
+      <p:sp>
+        <p:nvSpPr>
+          <p:cNvPr id="19" name="C1-E31 text 17" descr="sci-ppt:o017"/>
+          <p:cNvSpPr txBox="1"/>
+          <p:nvPr/>
+        </p:nvSpPr>
+        <p:spPr>
+          <a:xfrm>
+            <a:off x="594360" y="3273552"/>
+            <a:ext cx="10972800" cy="254889"/>
+          </a:xfrm>
+          <a:prstGeom prst="rect">
+            <a:avLst/>
+          </a:prstGeom>
+          <a:noFill/>
+          <a:effectLst/>
+        </p:spPr>
+        <p:txBody>
+          <a:bodyPr wrap="none" lIns="18288" rIns="18288" tIns="18288" bIns="18288" anchor="t">
+            <a:spAutoFit/>
+          </a:bodyPr>
+          <a:lstStyle/>
+          <a:p>
             <a:pPr algn="l">
               <a:spcAft>
                 <a:spcPts val="0"/>
               </a:spcAft>
             </a:pPr>
             <a:r>
-              <a:rPr sz="1400" b="1" i="0">
+              <a:rPr sz="1350" b="1" i="0">
                 <a:solidFill>
                   <a:srgbClr val="8EDBD4"/>
                 </a:solidFill>
                 <a:latin typeface="Arial"/>
               </a:rPr>
-              <a:t>A pressure pulse crossing a distance Lₑ</a:t>
-            </a:r>
-          </a:p>
-        </p:txBody>
-      </p:sp>
-      <p:sp>
-        <p:nvSpPr>
-          <p:cNvPr id="4" name="C1-E31 rect 2" descr="sci-ppt:o002"/>
-          <p:cNvSpPr/>
-          <p:nvPr/>
-        </p:nvSpPr>
-        <p:spPr>
-          <a:xfrm>
-            <a:off x="548640" y="2194560"/>
-            <a:ext cx="5120640" cy="502920"/>
-          </a:xfrm>
-          <a:prstGeom prst="rect">
-            <a:avLst/>
-          </a:prstGeom>
-          <a:solidFill>
-            <a:srgbClr val="1E4A5A"/>
-          </a:solidFill>
-          <a:ln w="15240">
-            <a:solidFill>
-              <a:srgbClr val="2B6678"/>
-            </a:solidFill>
-          </a:ln>
-          <a:effectLst/>
-        </p:spPr>
-        <p:txBody>
-          <a:bodyPr rtlCol="0" anchor="ctr"/>
-          <a:lstStyle/>
-          <a:p>
-            <a:pPr algn="ctr"/>
-          </a:p>
-        </p:txBody>
-      </p:sp>
-      <p:sp>
-        <p:nvSpPr>
-          <p:cNvPr id="5" name="C1-E31 text 3" descr="sci-ppt:o003"/>
+              <a:t>Reference formulas of the defence answer</a:t>
+            </a:r>
+          </a:p>
+        </p:txBody>
+      </p:sp>
+      <p:sp>
+        <p:nvSpPr>
+          <p:cNvPr id="20" name="C1-E31 text 18" descr="sci-ppt:o018"/>
           <p:cNvSpPr txBox="1"/>
           <p:nvPr/>
         </p:nvSpPr>
         <p:spPr>
           <a:xfrm>
-            <a:off x="548640" y="1417319"/>
-            <a:ext cx="5120640" cy="239395"/>
+            <a:off x="594360" y="3657600"/>
+            <a:ext cx="10972800" cy="479551"/>
           </a:xfrm>
           <a:prstGeom prst="rect">
             <a:avLst/>
@@ -3237,305 +3837,43 @@
               </a:spcAft>
             </a:pPr>
             <a:r>
-              <a:rPr sz="1250" b="1" i="0">
+              <a:rPr sz="1400" b="1" i="0">
                 <a:solidFill>
-                  <a:srgbClr val="8EDBD4"/>
+                  <a:srgbClr val="E7F0F3"/>
                 </a:solidFill>
                 <a:latin typeface="Arial"/>
               </a:rPr>
-              <a:t>slow rise: τₑ ≫ Lₑ/c</a:t>
-            </a:r>
-          </a:p>
-        </p:txBody>
-      </p:sp>
-      <p:sp>
-        <p:nvSpPr>
-          <p:cNvPr id="6" name="C1-E31 polygon 4" descr="sci-ppt:o004"/>
-          <p:cNvSpPr/>
-          <p:nvPr/>
-        </p:nvSpPr>
-        <p:spPr>
-          <a:xfrm>
-            <a:off x="548640" y="2087051"/>
-            <a:ext cx="5120640" cy="419841"/>
-          </a:xfrm>
-          <a:custGeom>
-            <a:avLst/>
-            <a:gdLst/>
-            <a:ahLst/>
-            <a:cxnLst/>
-            <a:rect l="l" t="t" r="r" b="b"/>
-            <a:pathLst>
-              <a:path w="5120640" h="419841">
-                <a:moveTo>
-                  <a:pt x="0" y="0"/>
-                </a:moveTo>
-                <a:lnTo>
-                  <a:pt x="64818" y="4051"/>
-                </a:lnTo>
-                <a:lnTo>
-                  <a:pt x="129636" y="8172"/>
-                </a:lnTo>
-                <a:lnTo>
-                  <a:pt x="194454" y="12363"/>
-                </a:lnTo>
-                <a:lnTo>
-                  <a:pt x="259272" y="16624"/>
-                </a:lnTo>
-                <a:lnTo>
-                  <a:pt x="324091" y="20955"/>
-                </a:lnTo>
-                <a:lnTo>
-                  <a:pt x="388909" y="25355"/>
-                </a:lnTo>
-                <a:lnTo>
-                  <a:pt x="453727" y="29823"/>
-                </a:lnTo>
-                <a:lnTo>
-                  <a:pt x="518545" y="34360"/>
-                </a:lnTo>
-                <a:lnTo>
-                  <a:pt x="583364" y="38964"/>
-                </a:lnTo>
-                <a:lnTo>
-                  <a:pt x="648182" y="43635"/>
-                </a:lnTo>
-                <a:lnTo>
-                  <a:pt x="713000" y="48372"/>
-                </a:lnTo>
-                <a:lnTo>
-                  <a:pt x="777818" y="53175"/>
-                </a:lnTo>
-                <a:lnTo>
-                  <a:pt x="842636" y="58041"/>
-                </a:lnTo>
-                <a:lnTo>
-                  <a:pt x="907455" y="62971"/>
-                </a:lnTo>
-                <a:lnTo>
-                  <a:pt x="972273" y="67964"/>
-                </a:lnTo>
-                <a:lnTo>
-                  <a:pt x="1037091" y="73017"/>
-                </a:lnTo>
-                <a:lnTo>
-                  <a:pt x="1101909" y="78129"/>
-                </a:lnTo>
-                <a:lnTo>
-                  <a:pt x="1166728" y="83300"/>
-                </a:lnTo>
-                <a:lnTo>
-                  <a:pt x="1231546" y="88528"/>
-                </a:lnTo>
-                <a:lnTo>
-                  <a:pt x="1296364" y="93811"/>
-                </a:lnTo>
-                <a:lnTo>
-                  <a:pt x="1361182" y="99148"/>
-                </a:lnTo>
-                <a:lnTo>
-                  <a:pt x="1426001" y="104536"/>
-                </a:lnTo>
-                <a:lnTo>
-                  <a:pt x="1490819" y="109975"/>
-                </a:lnTo>
-                <a:lnTo>
-                  <a:pt x="1555637" y="115462"/>
-                </a:lnTo>
-                <a:lnTo>
-                  <a:pt x="1620455" y="120995"/>
-                </a:lnTo>
-                <a:lnTo>
-                  <a:pt x="1685273" y="126572"/>
-                </a:lnTo>
-                <a:lnTo>
-                  <a:pt x="1750092" y="132191"/>
-                </a:lnTo>
-                <a:lnTo>
-                  <a:pt x="1814910" y="137850"/>
-                </a:lnTo>
-                <a:lnTo>
-                  <a:pt x="1879728" y="143547"/>
-                </a:lnTo>
-                <a:lnTo>
-                  <a:pt x="1944546" y="149279"/>
-                </a:lnTo>
-                <a:lnTo>
-                  <a:pt x="2009365" y="155044"/>
-                </a:lnTo>
-                <a:lnTo>
-                  <a:pt x="2074183" y="160839"/>
-                </a:lnTo>
-                <a:lnTo>
-                  <a:pt x="2139001" y="166662"/>
-                </a:lnTo>
-                <a:lnTo>
-                  <a:pt x="2203819" y="172511"/>
-                </a:lnTo>
-                <a:lnTo>
-                  <a:pt x="2268637" y="178382"/>
-                </a:lnTo>
-                <a:lnTo>
-                  <a:pt x="2333456" y="184274"/>
-                </a:lnTo>
-                <a:lnTo>
-                  <a:pt x="2398274" y="190183"/>
-                </a:lnTo>
-                <a:lnTo>
-                  <a:pt x="2463092" y="196106"/>
-                </a:lnTo>
-                <a:lnTo>
-                  <a:pt x="2527910" y="202042"/>
-                </a:lnTo>
-                <a:lnTo>
-                  <a:pt x="2592729" y="207987"/>
-                </a:lnTo>
-                <a:lnTo>
-                  <a:pt x="2657547" y="213939"/>
-                </a:lnTo>
-                <a:lnTo>
-                  <a:pt x="2722365" y="219894"/>
-                </a:lnTo>
-                <a:lnTo>
-                  <a:pt x="2787183" y="225850"/>
-                </a:lnTo>
-                <a:lnTo>
-                  <a:pt x="2852002" y="231804"/>
-                </a:lnTo>
-                <a:lnTo>
-                  <a:pt x="2916820" y="237754"/>
-                </a:lnTo>
-                <a:lnTo>
-                  <a:pt x="2981638" y="243696"/>
-                </a:lnTo>
-                <a:lnTo>
-                  <a:pt x="3046456" y="249628"/>
-                </a:lnTo>
-                <a:lnTo>
-                  <a:pt x="3111274" y="255546"/>
-                </a:lnTo>
-                <a:lnTo>
-                  <a:pt x="3176093" y="261450"/>
-                </a:lnTo>
-                <a:lnTo>
-                  <a:pt x="3240911" y="267334"/>
-                </a:lnTo>
-                <a:lnTo>
-                  <a:pt x="3305729" y="273198"/>
-                </a:lnTo>
-                <a:lnTo>
-                  <a:pt x="3370547" y="279038"/>
-                </a:lnTo>
-                <a:lnTo>
-                  <a:pt x="3435366" y="284851"/>
-                </a:lnTo>
-                <a:lnTo>
-                  <a:pt x="3500184" y="290636"/>
-                </a:lnTo>
-                <a:lnTo>
-                  <a:pt x="3565002" y="296389"/>
-                </a:lnTo>
-                <a:lnTo>
-                  <a:pt x="3629820" y="302109"/>
-                </a:lnTo>
-                <a:lnTo>
-                  <a:pt x="3694638" y="307792"/>
-                </a:lnTo>
-                <a:lnTo>
-                  <a:pt x="3759457" y="313437"/>
-                </a:lnTo>
-                <a:lnTo>
-                  <a:pt x="3824275" y="319042"/>
-                </a:lnTo>
-                <a:lnTo>
-                  <a:pt x="3889093" y="324603"/>
-                </a:lnTo>
-                <a:lnTo>
-                  <a:pt x="3953911" y="330120"/>
-                </a:lnTo>
-                <a:lnTo>
-                  <a:pt x="4018730" y="335590"/>
-                </a:lnTo>
-                <a:lnTo>
-                  <a:pt x="4083548" y="341011"/>
-                </a:lnTo>
-                <a:lnTo>
-                  <a:pt x="4148366" y="346381"/>
-                </a:lnTo>
-                <a:lnTo>
-                  <a:pt x="4213184" y="351699"/>
-                </a:lnTo>
-                <a:lnTo>
-                  <a:pt x="4278003" y="356962"/>
-                </a:lnTo>
-                <a:lnTo>
-                  <a:pt x="4342821" y="362170"/>
-                </a:lnTo>
-                <a:lnTo>
-                  <a:pt x="4407639" y="367320"/>
-                </a:lnTo>
-                <a:lnTo>
-                  <a:pt x="4472457" y="372412"/>
-                </a:lnTo>
-                <a:lnTo>
-                  <a:pt x="4537275" y="377443"/>
-                </a:lnTo>
-                <a:lnTo>
-                  <a:pt x="4602094" y="382414"/>
-                </a:lnTo>
-                <a:lnTo>
-                  <a:pt x="4666912" y="387321"/>
-                </a:lnTo>
-                <a:lnTo>
-                  <a:pt x="4731730" y="392165"/>
-                </a:lnTo>
-                <a:lnTo>
-                  <a:pt x="4796548" y="396944"/>
-                </a:lnTo>
-                <a:lnTo>
-                  <a:pt x="4861367" y="401658"/>
-                </a:lnTo>
-                <a:lnTo>
-                  <a:pt x="4926185" y="406305"/>
-                </a:lnTo>
-                <a:lnTo>
-                  <a:pt x="4991003" y="410885"/>
-                </a:lnTo>
-                <a:lnTo>
-                  <a:pt x="5055821" y="415397"/>
-                </a:lnTo>
-                <a:lnTo>
-                  <a:pt x="5120640" y="419841"/>
-                </a:lnTo>
-              </a:path>
-            </a:pathLst>
-          </a:custGeom>
-          <a:noFill/>
-          <a:ln w="38100">
-            <a:solidFill>
-              <a:srgbClr val="8EDBD4"/>
-            </a:solidFill>
-          </a:ln>
-          <a:effectLst/>
-        </p:spPr>
-        <p:txBody>
-          <a:bodyPr rtlCol="0" anchor="ctr"/>
-          <a:lstStyle/>
-          <a:p>
-            <a:pPr algn="ctr"/>
-          </a:p>
-        </p:txBody>
-      </p:sp>
-      <p:sp>
-        <p:nvSpPr>
-          <p:cNvPr id="7" name="C1-E31 text 5" descr="sci-ppt:o005"/>
+              <a:t>ρ(RR̈ + 3Ṙ²/2) = p_b − p∞ − 2σ/R − 4μṘ/R</a:t>
+            </a:r>
+          </a:p>
+          <a:p>
+            <a:pPr algn="l">
+              <a:spcAft>
+                <a:spcPts val="0"/>
+              </a:spcAft>
+            </a:pPr>
+            <a:r>
+              <a:rPr sz="1400" b="1" i="0">
+                <a:solidFill>
+                  <a:srgbClr val="E7F0F3"/>
+                </a:solidFill>
+                <a:latin typeface="Arial"/>
+              </a:rPr>
+              <a:t>p_b = pᵥ,PFC + pᵥ,w + p_g</a:t>
+            </a:r>
+          </a:p>
+        </p:txBody>
+      </p:sp>
+      <p:sp>
+        <p:nvSpPr>
+          <p:cNvPr id="21" name="C1-E31 text 19" descr="sci-ppt:o019"/>
           <p:cNvSpPr txBox="1"/>
           <p:nvPr/>
         </p:nvSpPr>
         <p:spPr>
           <a:xfrm>
-            <a:off x="548640" y="2752344"/>
-            <a:ext cx="5120640" cy="208407"/>
+            <a:off x="457200" y="4846320"/>
+            <a:ext cx="11247120" cy="464057"/>
           </a:xfrm>
           <a:prstGeom prst="rect">
             <a:avLst/>
@@ -3555,1842 +3893,76 @@
               </a:spcAft>
             </a:pPr>
             <a:r>
-              <a:rPr sz="1050" b="0" i="0">
+              <a:rPr sz="1350" b="0" i="0">
+                <a:solidFill>
+                  <a:srgbClr val="F2B880"/>
+                </a:solidFill>
+                <a:latin typeface="Arial"/>
+              </a:rPr>
+              <a:t>The source pressure moves carrier liquid. Whether that motion becomes a useful jet is decided by geometry, not by the</a:t>
+            </a:r>
+          </a:p>
+          <a:p>
+            <a:pPr algn="l">
+              <a:spcAft>
+                <a:spcPts val="0"/>
+              </a:spcAft>
+            </a:pPr>
+            <a:r>
+              <a:rPr sz="1350" b="0" i="0">
+                <a:solidFill>
+                  <a:srgbClr val="F2B880"/>
+                </a:solidFill>
+                <a:latin typeface="Arial"/>
+              </a:rPr>
+              <a:t>pressure alone.</a:t>
+            </a:r>
+          </a:p>
+        </p:txBody>
+      </p:sp>
+      <p:sp>
+        <p:nvSpPr>
+          <p:cNvPr id="22" name="C1-E31 text 20" descr="sci-ppt:o020"/>
+          <p:cNvSpPr txBox="1"/>
+          <p:nvPr/>
+        </p:nvSpPr>
+        <p:spPr>
+          <a:xfrm>
+            <a:off x="457200" y="5394960"/>
+            <a:ext cx="11247120" cy="239395"/>
+          </a:xfrm>
+          <a:prstGeom prst="rect">
+            <a:avLst/>
+          </a:prstGeom>
+          <a:noFill/>
+          <a:effectLst/>
+        </p:spPr>
+        <p:txBody>
+          <a:bodyPr wrap="none" lIns="18288" rIns="18288" tIns="18288" bIns="18288" anchor="t">
+            <a:spAutoFit/>
+          </a:bodyPr>
+          <a:lstStyle/>
+          <a:p>
+            <a:pPr algn="l">
+              <a:spcAft>
+                <a:spcPts val="0"/>
+              </a:spcAft>
+            </a:pPr>
+            <a:r>
+              <a:rPr sz="1250" b="0" i="0">
                 <a:solidFill>
                   <a:srgbClr val="B4C7D2"/>
                 </a:solidFill>
                 <a:latin typeface="Arial"/>
               </a:rPr>
-              <a:t>pressure along the column at one instant</a:t>
-            </a:r>
-          </a:p>
-        </p:txBody>
-      </p:sp>
-      <p:sp>
-        <p:nvSpPr>
-          <p:cNvPr id="8" name="C1-E31 rect 6" descr="sci-ppt:o006"/>
-          <p:cNvSpPr/>
-          <p:nvPr/>
-        </p:nvSpPr>
-        <p:spPr>
-          <a:xfrm>
-            <a:off x="548640" y="4114800"/>
-            <a:ext cx="5120640" cy="502920"/>
-          </a:xfrm>
-          <a:prstGeom prst="rect">
-            <a:avLst/>
-          </a:prstGeom>
-          <a:solidFill>
-            <a:srgbClr val="1E4A5A"/>
-          </a:solidFill>
-          <a:ln w="15240">
-            <a:solidFill>
-              <a:srgbClr val="2B6678"/>
-            </a:solidFill>
-          </a:ln>
-          <a:effectLst/>
-        </p:spPr>
-        <p:txBody>
-          <a:bodyPr rtlCol="0" anchor="ctr"/>
-          <a:lstStyle/>
-          <a:p>
-            <a:pPr algn="ctr"/>
-          </a:p>
-        </p:txBody>
-      </p:sp>
-      <p:sp>
-        <p:nvSpPr>
-          <p:cNvPr id="9" name="C1-E31 text 7" descr="sci-ppt:o007"/>
-          <p:cNvSpPr txBox="1"/>
-          <p:nvPr/>
-        </p:nvSpPr>
-        <p:spPr>
-          <a:xfrm>
-            <a:off x="548640" y="3337560"/>
-            <a:ext cx="5120640" cy="239395"/>
-          </a:xfrm>
-          <a:prstGeom prst="rect">
-            <a:avLst/>
-          </a:prstGeom>
-          <a:noFill/>
-          <a:effectLst/>
-        </p:spPr>
-        <p:txBody>
-          <a:bodyPr wrap="none" lIns="18288" rIns="18288" tIns="18288" bIns="18288" anchor="t">
-            <a:spAutoFit/>
-          </a:bodyPr>
-          <a:lstStyle/>
-          <a:p>
-            <a:pPr algn="l">
-              <a:spcAft>
-                <a:spcPts val="0"/>
-              </a:spcAft>
-            </a:pPr>
-            <a:r>
-              <a:rPr sz="1250" b="1" i="0">
-                <a:solidFill>
-                  <a:srgbClr val="F28BA0"/>
-                </a:solidFill>
-                <a:latin typeface="Arial"/>
-              </a:rPr>
-              <a:t>fast rise: τₑ ≪ Lₑ/c</a:t>
-            </a:r>
-          </a:p>
-        </p:txBody>
-      </p:sp>
-      <p:sp>
-        <p:nvSpPr>
-          <p:cNvPr id="10" name="C1-E31 polygon 8" descr="sci-ppt:o008"/>
-          <p:cNvSpPr/>
-          <p:nvPr/>
-        </p:nvSpPr>
-        <p:spPr>
-          <a:xfrm>
-            <a:off x="548640" y="3840565"/>
-            <a:ext cx="5120640" cy="776866"/>
-          </a:xfrm>
-          <a:custGeom>
-            <a:avLst/>
-            <a:gdLst/>
-            <a:ahLst/>
-            <a:cxnLst/>
-            <a:rect l="l" t="t" r="r" b="b"/>
-            <a:pathLst>
-              <a:path w="5120640" h="776866">
-                <a:moveTo>
-                  <a:pt x="0" y="0"/>
-                </a:moveTo>
-                <a:lnTo>
-                  <a:pt x="64818" y="21"/>
-                </a:lnTo>
-                <a:lnTo>
-                  <a:pt x="129636" y="46"/>
-                </a:lnTo>
-                <a:lnTo>
-                  <a:pt x="194454" y="78"/>
-                </a:lnTo>
-                <a:lnTo>
-                  <a:pt x="259272" y="117"/>
-                </a:lnTo>
-                <a:lnTo>
-                  <a:pt x="324091" y="166"/>
-                </a:lnTo>
-                <a:lnTo>
-                  <a:pt x="388909" y="226"/>
-                </a:lnTo>
-                <a:lnTo>
-                  <a:pt x="453727" y="301"/>
-                </a:lnTo>
-                <a:lnTo>
-                  <a:pt x="518545" y="394"/>
-                </a:lnTo>
-                <a:lnTo>
-                  <a:pt x="583364" y="509"/>
-                </a:lnTo>
-                <a:lnTo>
-                  <a:pt x="648182" y="651"/>
-                </a:lnTo>
-                <a:lnTo>
-                  <a:pt x="713000" y="828"/>
-                </a:lnTo>
-                <a:lnTo>
-                  <a:pt x="777818" y="1047"/>
-                </a:lnTo>
-                <a:lnTo>
-                  <a:pt x="842636" y="1319"/>
-                </a:lnTo>
-                <a:lnTo>
-                  <a:pt x="907455" y="1656"/>
-                </a:lnTo>
-                <a:lnTo>
-                  <a:pt x="972273" y="2073"/>
-                </a:lnTo>
-                <a:lnTo>
-                  <a:pt x="1037091" y="2590"/>
-                </a:lnTo>
-                <a:lnTo>
-                  <a:pt x="1101909" y="3230"/>
-                </a:lnTo>
-                <a:lnTo>
-                  <a:pt x="1166728" y="4022"/>
-                </a:lnTo>
-                <a:lnTo>
-                  <a:pt x="1231546" y="5003"/>
-                </a:lnTo>
-                <a:lnTo>
-                  <a:pt x="1296364" y="6215"/>
-                </a:lnTo>
-                <a:lnTo>
-                  <a:pt x="1361182" y="7714"/>
-                </a:lnTo>
-                <a:lnTo>
-                  <a:pt x="1426001" y="9565"/>
-                </a:lnTo>
-                <a:lnTo>
-                  <a:pt x="1490819" y="11849"/>
-                </a:lnTo>
-                <a:lnTo>
-                  <a:pt x="1555637" y="14662"/>
-                </a:lnTo>
-                <a:lnTo>
-                  <a:pt x="1620455" y="18123"/>
-                </a:lnTo>
-                <a:lnTo>
-                  <a:pt x="1685273" y="22372"/>
-                </a:lnTo>
-                <a:lnTo>
-                  <a:pt x="1750092" y="27576"/>
-                </a:lnTo>
-                <a:lnTo>
-                  <a:pt x="1814910" y="33932"/>
-                </a:lnTo>
-                <a:lnTo>
-                  <a:pt x="1879728" y="41667"/>
-                </a:lnTo>
-                <a:lnTo>
-                  <a:pt x="1944546" y="51040"/>
-                </a:lnTo>
-                <a:lnTo>
-                  <a:pt x="2009365" y="62339"/>
-                </a:lnTo>
-                <a:lnTo>
-                  <a:pt x="2074183" y="75873"/>
-                </a:lnTo>
-                <a:lnTo>
-                  <a:pt x="2139001" y="91964"/>
-                </a:lnTo>
-                <a:lnTo>
-                  <a:pt x="2203819" y="110924"/>
-                </a:lnTo>
-                <a:lnTo>
-                  <a:pt x="2268637" y="133030"/>
-                </a:lnTo>
-                <a:lnTo>
-                  <a:pt x="2333456" y="158492"/>
-                </a:lnTo>
-                <a:lnTo>
-                  <a:pt x="2398274" y="187405"/>
-                </a:lnTo>
-                <a:lnTo>
-                  <a:pt x="2463092" y="219717"/>
-                </a:lnTo>
-                <a:lnTo>
-                  <a:pt x="2527910" y="255188"/>
-                </a:lnTo>
-                <a:lnTo>
-                  <a:pt x="2592729" y="293369"/>
-                </a:lnTo>
-                <a:lnTo>
-                  <a:pt x="2657547" y="333610"/>
-                </a:lnTo>
-                <a:lnTo>
-                  <a:pt x="2722365" y="375090"/>
-                </a:lnTo>
-                <a:lnTo>
-                  <a:pt x="2787183" y="416879"/>
-                </a:lnTo>
-                <a:lnTo>
-                  <a:pt x="2852002" y="458019"/>
-                </a:lnTo>
-                <a:lnTo>
-                  <a:pt x="2916820" y="497611"/>
-                </a:lnTo>
-                <a:lnTo>
-                  <a:pt x="2981638" y="534888"/>
-                </a:lnTo>
-                <a:lnTo>
-                  <a:pt x="3046456" y="569271"/>
-                </a:lnTo>
-                <a:lnTo>
-                  <a:pt x="3111274" y="600387"/>
-                </a:lnTo>
-                <a:lnTo>
-                  <a:pt x="3176093" y="628065"/>
-                </a:lnTo>
-                <a:lnTo>
-                  <a:pt x="3240911" y="652310"/>
-                </a:lnTo>
-                <a:lnTo>
-                  <a:pt x="3305729" y="673264"/>
-                </a:lnTo>
-                <a:lnTo>
-                  <a:pt x="3370547" y="691165"/>
-                </a:lnTo>
-                <a:lnTo>
-                  <a:pt x="3435366" y="706306"/>
-                </a:lnTo>
-                <a:lnTo>
-                  <a:pt x="3500184" y="719006"/>
-                </a:lnTo>
-                <a:lnTo>
-                  <a:pt x="3565002" y="729582"/>
-                </a:lnTo>
-                <a:lnTo>
-                  <a:pt x="3629820" y="738338"/>
-                </a:lnTo>
-                <a:lnTo>
-                  <a:pt x="3694638" y="745553"/>
-                </a:lnTo>
-                <a:lnTo>
-                  <a:pt x="3759457" y="751473"/>
-                </a:lnTo>
-                <a:lnTo>
-                  <a:pt x="3824275" y="756315"/>
-                </a:lnTo>
-                <a:lnTo>
-                  <a:pt x="3889093" y="760265"/>
-                </a:lnTo>
-                <a:lnTo>
-                  <a:pt x="3953911" y="763480"/>
-                </a:lnTo>
-                <a:lnTo>
-                  <a:pt x="4018730" y="766091"/>
-                </a:lnTo>
-                <a:lnTo>
-                  <a:pt x="4083548" y="768210"/>
-                </a:lnTo>
-                <a:lnTo>
-                  <a:pt x="4148366" y="769927"/>
-                </a:lnTo>
-                <a:lnTo>
-                  <a:pt x="4213184" y="771317"/>
-                </a:lnTo>
-                <a:lnTo>
-                  <a:pt x="4278003" y="772441"/>
-                </a:lnTo>
-                <a:lnTo>
-                  <a:pt x="4342821" y="773350"/>
-                </a:lnTo>
-                <a:lnTo>
-                  <a:pt x="4407639" y="774084"/>
-                </a:lnTo>
-                <a:lnTo>
-                  <a:pt x="4472457" y="774677"/>
-                </a:lnTo>
-                <a:lnTo>
-                  <a:pt x="4537275" y="775156"/>
-                </a:lnTo>
-                <a:lnTo>
-                  <a:pt x="4602094" y="775542"/>
-                </a:lnTo>
-                <a:lnTo>
-                  <a:pt x="4666912" y="775854"/>
-                </a:lnTo>
-                <a:lnTo>
-                  <a:pt x="4731730" y="776106"/>
-                </a:lnTo>
-                <a:lnTo>
-                  <a:pt x="4796548" y="776309"/>
-                </a:lnTo>
-                <a:lnTo>
-                  <a:pt x="4861367" y="776472"/>
-                </a:lnTo>
-                <a:lnTo>
-                  <a:pt x="4926185" y="776604"/>
-                </a:lnTo>
-                <a:lnTo>
-                  <a:pt x="4991003" y="776711"/>
-                </a:lnTo>
-                <a:lnTo>
-                  <a:pt x="5055821" y="776797"/>
-                </a:lnTo>
-                <a:lnTo>
-                  <a:pt x="5120640" y="776866"/>
-                </a:lnTo>
-              </a:path>
-            </a:pathLst>
-          </a:custGeom>
-          <a:noFill/>
-          <a:ln w="38100">
-            <a:solidFill>
-              <a:srgbClr val="F28BA0"/>
-            </a:solidFill>
-          </a:ln>
-          <a:effectLst/>
-        </p:spPr>
-        <p:txBody>
-          <a:bodyPr rtlCol="0" anchor="ctr"/>
-          <a:lstStyle/>
-          <a:p>
-            <a:pPr algn="ctr"/>
-          </a:p>
-        </p:txBody>
-      </p:sp>
-      <p:sp>
-        <p:nvSpPr>
-          <p:cNvPr id="11" name="C1-E31 text 9" descr="sci-ppt:o009"/>
-          <p:cNvSpPr txBox="1"/>
-          <p:nvPr/>
-        </p:nvSpPr>
-        <p:spPr>
-          <a:xfrm>
-            <a:off x="548640" y="4672584"/>
-            <a:ext cx="5120640" cy="208407"/>
-          </a:xfrm>
-          <a:prstGeom prst="rect">
-            <a:avLst/>
-          </a:prstGeom>
-          <a:noFill/>
-          <a:effectLst/>
-        </p:spPr>
-        <p:txBody>
-          <a:bodyPr wrap="none" lIns="18288" rIns="18288" tIns="18288" bIns="18288" anchor="t">
-            <a:spAutoFit/>
-          </a:bodyPr>
-          <a:lstStyle/>
-          <a:p>
-            <a:pPr algn="l">
-              <a:spcAft>
-                <a:spcPts val="0"/>
-              </a:spcAft>
-            </a:pPr>
-            <a:r>
-              <a:rPr sz="1050" b="0" i="0">
-                <a:solidFill>
-                  <a:srgbClr val="B4C7D2"/>
-                </a:solidFill>
-                <a:latin typeface="Arial"/>
-              </a:rPr>
-              <a:t>pressure along the column at one instant</a:t>
-            </a:r>
-          </a:p>
-        </p:txBody>
-      </p:sp>
-      <p:cxnSp>
-        <p:nvCxnSpPr>
-          <p:cNvPr id="12" name="C1-E31 line 10" descr="sci-ppt:o010"/>
-          <p:cNvCxnSpPr/>
-          <p:nvPr/>
-        </p:nvCxnSpPr>
-        <p:spPr>
-          <a:xfrm>
-            <a:off x="6858000" y="4709160"/>
-            <a:ext cx="4937760" cy="0"/>
-          </a:xfrm>
-          <a:prstGeom prst="line">
-            <a:avLst/>
-          </a:prstGeom>
-          <a:ln w="19050">
-            <a:solidFill>
-              <a:srgbClr val="B4C7D2"/>
-            </a:solidFill>
-          </a:ln>
-          <a:effectLst/>
-        </p:spPr>
-      </p:cxnSp>
-      <p:cxnSp>
-        <p:nvCxnSpPr>
-          <p:cNvPr id="13" name="C1-E31 line 11" descr="sci-ppt:o011"/>
-          <p:cNvCxnSpPr/>
-          <p:nvPr/>
-        </p:nvCxnSpPr>
-        <p:spPr>
-          <a:xfrm>
-            <a:off x="6858000" y="1417320"/>
-            <a:ext cx="0" cy="3291840"/>
-          </a:xfrm>
-          <a:prstGeom prst="line">
-            <a:avLst/>
-          </a:prstGeom>
-          <a:ln w="19050">
-            <a:solidFill>
-              <a:srgbClr val="B4C7D2"/>
-            </a:solidFill>
-          </a:ln>
-          <a:effectLst/>
-        </p:spPr>
-      </p:cxnSp>
-      <p:cxnSp>
-        <p:nvCxnSpPr>
-          <p:cNvPr id="14" name="C1-E31 line 12" descr="sci-ppt:o012"/>
-          <p:cNvCxnSpPr/>
-          <p:nvPr/>
-        </p:nvCxnSpPr>
-        <p:spPr>
-          <a:xfrm>
-            <a:off x="6858000" y="4709160"/>
-            <a:ext cx="0" cy="64008"/>
-          </a:xfrm>
-          <a:prstGeom prst="line">
-            <a:avLst/>
-          </a:prstGeom>
-          <a:ln w="12700">
-            <a:solidFill>
-              <a:srgbClr val="B4C7D2"/>
-            </a:solidFill>
-          </a:ln>
-          <a:effectLst/>
-        </p:spPr>
-      </p:cxnSp>
-      <p:cxnSp>
-        <p:nvCxnSpPr>
-          <p:cNvPr id="15" name="C1-E31 line 13" descr="sci-ppt:o013"/>
-          <p:cNvCxnSpPr/>
-          <p:nvPr/>
-        </p:nvCxnSpPr>
-        <p:spPr>
-          <a:xfrm>
-            <a:off x="6858000" y="1417320"/>
-            <a:ext cx="0" cy="3291840"/>
-          </a:xfrm>
-          <a:prstGeom prst="line">
-            <a:avLst/>
-          </a:prstGeom>
-          <a:ln w="7620">
-            <a:solidFill>
-              <a:srgbClr val="2E4756"/>
-            </a:solidFill>
-          </a:ln>
-          <a:effectLst/>
-        </p:spPr>
-      </p:cxnSp>
-      <p:sp>
-        <p:nvSpPr>
-          <p:cNvPr id="16" name="C1-E31 text 14" descr="sci-ppt:o014"/>
-          <p:cNvSpPr txBox="1"/>
-          <p:nvPr/>
-        </p:nvSpPr>
-        <p:spPr>
-          <a:xfrm>
-            <a:off x="6400800" y="4791456"/>
-            <a:ext cx="914400" cy="208407"/>
-          </a:xfrm>
-          <a:prstGeom prst="rect">
-            <a:avLst/>
-          </a:prstGeom>
-          <a:noFill/>
-          <a:effectLst/>
-        </p:spPr>
-        <p:txBody>
-          <a:bodyPr wrap="none" lIns="18288" rIns="18288" tIns="18288" bIns="18288" anchor="t">
-            <a:spAutoFit/>
-          </a:bodyPr>
-          <a:lstStyle/>
-          <a:p>
-            <a:pPr algn="ctr">
-              <a:spcAft>
-                <a:spcPts val="0"/>
-              </a:spcAft>
-            </a:pPr>
-            <a:r>
-              <a:rPr sz="1050" b="0" i="0">
-                <a:solidFill>
-                  <a:srgbClr val="B4C7D2"/>
-                </a:solidFill>
-                <a:latin typeface="Arial"/>
-              </a:rPr>
-              <a:t>1e-05</a:t>
-            </a:r>
-          </a:p>
-        </p:txBody>
-      </p:sp>
-      <p:cxnSp>
-        <p:nvCxnSpPr>
-          <p:cNvPr id="17" name="C1-E31 line 15" descr="sci-ppt:o015"/>
-          <p:cNvCxnSpPr/>
-          <p:nvPr/>
-        </p:nvCxnSpPr>
-        <p:spPr>
-          <a:xfrm>
-            <a:off x="8503920" y="4709160"/>
-            <a:ext cx="0" cy="64008"/>
-          </a:xfrm>
-          <a:prstGeom prst="line">
-            <a:avLst/>
-          </a:prstGeom>
-          <a:ln w="12700">
-            <a:solidFill>
-              <a:srgbClr val="B4C7D2"/>
-            </a:solidFill>
-          </a:ln>
-          <a:effectLst/>
-        </p:spPr>
-      </p:cxnSp>
-      <p:cxnSp>
-        <p:nvCxnSpPr>
-          <p:cNvPr id="18" name="C1-E31 line 16" descr="sci-ppt:o016"/>
-          <p:cNvCxnSpPr/>
-          <p:nvPr/>
-        </p:nvCxnSpPr>
-        <p:spPr>
-          <a:xfrm>
-            <a:off x="8503920" y="1417320"/>
-            <a:ext cx="0" cy="3291840"/>
-          </a:xfrm>
-          <a:prstGeom prst="line">
-            <a:avLst/>
-          </a:prstGeom>
-          <a:ln w="7620">
-            <a:solidFill>
-              <a:srgbClr val="2E4756"/>
-            </a:solidFill>
-          </a:ln>
-          <a:effectLst/>
-        </p:spPr>
-      </p:cxnSp>
-      <p:sp>
-        <p:nvSpPr>
-          <p:cNvPr id="19" name="C1-E31 text 17" descr="sci-ppt:o017"/>
-          <p:cNvSpPr txBox="1"/>
-          <p:nvPr/>
-        </p:nvSpPr>
-        <p:spPr>
-          <a:xfrm>
-            <a:off x="8046720" y="4791456"/>
-            <a:ext cx="914400" cy="208407"/>
-          </a:xfrm>
-          <a:prstGeom prst="rect">
-            <a:avLst/>
-          </a:prstGeom>
-          <a:noFill/>
-          <a:effectLst/>
-        </p:spPr>
-        <p:txBody>
-          <a:bodyPr wrap="none" lIns="18288" rIns="18288" tIns="18288" bIns="18288" anchor="t">
-            <a:spAutoFit/>
-          </a:bodyPr>
-          <a:lstStyle/>
-          <a:p>
-            <a:pPr algn="ctr">
-              <a:spcAft>
-                <a:spcPts val="0"/>
-              </a:spcAft>
-            </a:pPr>
-            <a:r>
-              <a:rPr sz="1050" b="0" i="0">
-                <a:solidFill>
-                  <a:srgbClr val="B4C7D2"/>
-                </a:solidFill>
-                <a:latin typeface="Arial"/>
-              </a:rPr>
-              <a:t>1e-04</a:t>
-            </a:r>
-          </a:p>
-        </p:txBody>
-      </p:sp>
-      <p:cxnSp>
-        <p:nvCxnSpPr>
-          <p:cNvPr id="20" name="C1-E31 line 18" descr="sci-ppt:o018"/>
-          <p:cNvCxnSpPr/>
-          <p:nvPr/>
-        </p:nvCxnSpPr>
-        <p:spPr>
-          <a:xfrm>
-            <a:off x="10149840" y="4709160"/>
-            <a:ext cx="0" cy="64008"/>
-          </a:xfrm>
-          <a:prstGeom prst="line">
-            <a:avLst/>
-          </a:prstGeom>
-          <a:ln w="12700">
-            <a:solidFill>
-              <a:srgbClr val="B4C7D2"/>
-            </a:solidFill>
-          </a:ln>
-          <a:effectLst/>
-        </p:spPr>
-      </p:cxnSp>
-      <p:cxnSp>
-        <p:nvCxnSpPr>
-          <p:cNvPr id="21" name="C1-E31 line 19" descr="sci-ppt:o019"/>
-          <p:cNvCxnSpPr/>
-          <p:nvPr/>
-        </p:nvCxnSpPr>
-        <p:spPr>
-          <a:xfrm>
-            <a:off x="10149840" y="1417320"/>
-            <a:ext cx="0" cy="3291840"/>
-          </a:xfrm>
-          <a:prstGeom prst="line">
-            <a:avLst/>
-          </a:prstGeom>
-          <a:ln w="7620">
-            <a:solidFill>
-              <a:srgbClr val="2E4756"/>
-            </a:solidFill>
-          </a:ln>
-          <a:effectLst/>
-        </p:spPr>
-      </p:cxnSp>
-      <p:sp>
-        <p:nvSpPr>
-          <p:cNvPr id="22" name="C1-E31 text 20" descr="sci-ppt:o020"/>
-          <p:cNvSpPr txBox="1"/>
-          <p:nvPr/>
-        </p:nvSpPr>
-        <p:spPr>
-          <a:xfrm>
-            <a:off x="9692640" y="4791456"/>
-            <a:ext cx="914400" cy="208407"/>
-          </a:xfrm>
-          <a:prstGeom prst="rect">
-            <a:avLst/>
-          </a:prstGeom>
-          <a:noFill/>
-          <a:effectLst/>
-        </p:spPr>
-        <p:txBody>
-          <a:bodyPr wrap="none" lIns="18288" rIns="18288" tIns="18288" bIns="18288" anchor="t">
-            <a:spAutoFit/>
-          </a:bodyPr>
-          <a:lstStyle/>
-          <a:p>
-            <a:pPr algn="ctr">
-              <a:spcAft>
-                <a:spcPts val="0"/>
-              </a:spcAft>
-            </a:pPr>
-            <a:r>
-              <a:rPr sz="1050" b="0" i="0">
-                <a:solidFill>
-                  <a:srgbClr val="B4C7D2"/>
-                </a:solidFill>
-                <a:latin typeface="Arial"/>
-              </a:rPr>
-              <a:t>1e-03</a:t>
-            </a:r>
-          </a:p>
-        </p:txBody>
-      </p:sp>
-      <p:cxnSp>
-        <p:nvCxnSpPr>
-          <p:cNvPr id="23" name="C1-E31 line 21" descr="sci-ppt:o021"/>
-          <p:cNvCxnSpPr/>
-          <p:nvPr/>
-        </p:nvCxnSpPr>
-        <p:spPr>
-          <a:xfrm>
-            <a:off x="11795760" y="4709160"/>
-            <a:ext cx="0" cy="64008"/>
-          </a:xfrm>
-          <a:prstGeom prst="line">
-            <a:avLst/>
-          </a:prstGeom>
-          <a:ln w="12700">
-            <a:solidFill>
-              <a:srgbClr val="B4C7D2"/>
-            </a:solidFill>
-          </a:ln>
-          <a:effectLst/>
-        </p:spPr>
-      </p:cxnSp>
-      <p:cxnSp>
-        <p:nvCxnSpPr>
-          <p:cNvPr id="24" name="C1-E31 line 22" descr="sci-ppt:o022"/>
-          <p:cNvCxnSpPr/>
-          <p:nvPr/>
-        </p:nvCxnSpPr>
-        <p:spPr>
-          <a:xfrm>
-            <a:off x="11795760" y="1417320"/>
-            <a:ext cx="0" cy="3291840"/>
-          </a:xfrm>
-          <a:prstGeom prst="line">
-            <a:avLst/>
-          </a:prstGeom>
-          <a:ln w="7620">
-            <a:solidFill>
-              <a:srgbClr val="2E4756"/>
-            </a:solidFill>
-          </a:ln>
-          <a:effectLst/>
-        </p:spPr>
-      </p:cxnSp>
-      <p:sp>
-        <p:nvSpPr>
-          <p:cNvPr id="25" name="C1-E31 text 23" descr="sci-ppt:o023"/>
-          <p:cNvSpPr txBox="1"/>
-          <p:nvPr/>
-        </p:nvSpPr>
-        <p:spPr>
-          <a:xfrm>
-            <a:off x="11338560" y="4791456"/>
-            <a:ext cx="914400" cy="208407"/>
-          </a:xfrm>
-          <a:prstGeom prst="rect">
-            <a:avLst/>
-          </a:prstGeom>
-          <a:noFill/>
-          <a:effectLst/>
-        </p:spPr>
-        <p:txBody>
-          <a:bodyPr wrap="none" lIns="18288" rIns="18288" tIns="18288" bIns="18288" anchor="t">
-            <a:spAutoFit/>
-          </a:bodyPr>
-          <a:lstStyle/>
-          <a:p>
-            <a:pPr algn="ctr">
-              <a:spcAft>
-                <a:spcPts val="0"/>
-              </a:spcAft>
-            </a:pPr>
-            <a:r>
-              <a:rPr sz="1050" b="0" i="0">
-                <a:solidFill>
-                  <a:srgbClr val="B4C7D2"/>
-                </a:solidFill>
-                <a:latin typeface="Arial"/>
-              </a:rPr>
-              <a:t>1e-02</a:t>
-            </a:r>
-          </a:p>
-        </p:txBody>
-      </p:sp>
-      <p:cxnSp>
-        <p:nvCxnSpPr>
-          <p:cNvPr id="26" name="C1-E31 line 24" descr="sci-ppt:o024"/>
-          <p:cNvCxnSpPr/>
-          <p:nvPr/>
-        </p:nvCxnSpPr>
-        <p:spPr>
-          <a:xfrm>
-            <a:off x="6793992" y="4709160"/>
-            <a:ext cx="64008" cy="0"/>
-          </a:xfrm>
-          <a:prstGeom prst="line">
-            <a:avLst/>
-          </a:prstGeom>
-          <a:ln w="12700">
-            <a:solidFill>
-              <a:srgbClr val="B4C7D2"/>
-            </a:solidFill>
-          </a:ln>
-          <a:effectLst/>
-        </p:spPr>
-      </p:cxnSp>
-      <p:cxnSp>
-        <p:nvCxnSpPr>
-          <p:cNvPr id="27" name="C1-E31 line 25" descr="sci-ppt:o025"/>
-          <p:cNvCxnSpPr/>
-          <p:nvPr/>
-        </p:nvCxnSpPr>
-        <p:spPr>
-          <a:xfrm>
-            <a:off x="6793992" y="3063240"/>
-            <a:ext cx="64008" cy="0"/>
-          </a:xfrm>
-          <a:prstGeom prst="line">
-            <a:avLst/>
-          </a:prstGeom>
-          <a:ln w="12700">
-            <a:solidFill>
-              <a:srgbClr val="B4C7D2"/>
-            </a:solidFill>
-          </a:ln>
-          <a:effectLst/>
-        </p:spPr>
-      </p:cxnSp>
-      <p:cxnSp>
-        <p:nvCxnSpPr>
-          <p:cNvPr id="28" name="C1-E31 line 26" descr="sci-ppt:o026"/>
-          <p:cNvCxnSpPr/>
-          <p:nvPr/>
-        </p:nvCxnSpPr>
-        <p:spPr>
-          <a:xfrm>
-            <a:off x="6858000" y="3063240"/>
-            <a:ext cx="4937760" cy="0"/>
-          </a:xfrm>
-          <a:prstGeom prst="line">
-            <a:avLst/>
-          </a:prstGeom>
-          <a:ln w="7620">
-            <a:solidFill>
-              <a:srgbClr val="2E4756"/>
-            </a:solidFill>
-          </a:ln>
-          <a:effectLst/>
-        </p:spPr>
-      </p:cxnSp>
-      <p:sp>
-        <p:nvSpPr>
-          <p:cNvPr id="29" name="C1-E31 text 27" descr="sci-ppt:o027"/>
-          <p:cNvSpPr txBox="1"/>
-          <p:nvPr/>
-        </p:nvSpPr>
-        <p:spPr>
-          <a:xfrm>
-            <a:off x="5989320" y="2980944"/>
-            <a:ext cx="777240" cy="208407"/>
-          </a:xfrm>
-          <a:prstGeom prst="rect">
-            <a:avLst/>
-          </a:prstGeom>
-          <a:noFill/>
-          <a:effectLst/>
-        </p:spPr>
-        <p:txBody>
-          <a:bodyPr wrap="none" lIns="18288" rIns="18288" tIns="18288" bIns="18288" anchor="t">
-            <a:spAutoFit/>
-          </a:bodyPr>
-          <a:lstStyle/>
-          <a:p>
-            <a:pPr algn="r">
-              <a:spcAft>
-                <a:spcPts val="0"/>
-              </a:spcAft>
-            </a:pPr>
-            <a:r>
-              <a:rPr sz="1050" b="0" i="0">
-                <a:solidFill>
-                  <a:srgbClr val="B4C7D2"/>
-                </a:solidFill>
-                <a:latin typeface="Arial"/>
-              </a:rPr>
-              <a:t>1e+00</a:t>
-            </a:r>
-          </a:p>
-        </p:txBody>
-      </p:sp>
-      <p:cxnSp>
-        <p:nvCxnSpPr>
-          <p:cNvPr id="30" name="C1-E31 line 28" descr="sci-ppt:o028"/>
-          <p:cNvCxnSpPr/>
-          <p:nvPr/>
-        </p:nvCxnSpPr>
-        <p:spPr>
-          <a:xfrm>
-            <a:off x="6793992" y="1417320"/>
-            <a:ext cx="64008" cy="0"/>
-          </a:xfrm>
-          <a:prstGeom prst="line">
-            <a:avLst/>
-          </a:prstGeom>
-          <a:ln w="12700">
-            <a:solidFill>
-              <a:srgbClr val="B4C7D2"/>
-            </a:solidFill>
-          </a:ln>
-          <a:effectLst/>
-        </p:spPr>
-      </p:cxnSp>
-      <p:cxnSp>
-        <p:nvCxnSpPr>
-          <p:cNvPr id="31" name="C1-E31 line 29" descr="sci-ppt:o029"/>
-          <p:cNvCxnSpPr/>
-          <p:nvPr/>
-        </p:nvCxnSpPr>
-        <p:spPr>
-          <a:xfrm>
-            <a:off x="6858000" y="1417320"/>
-            <a:ext cx="4937760" cy="0"/>
-          </a:xfrm>
-          <a:prstGeom prst="line">
-            <a:avLst/>
-          </a:prstGeom>
-          <a:ln w="7620">
-            <a:solidFill>
-              <a:srgbClr val="2E4756"/>
-            </a:solidFill>
-          </a:ln>
-          <a:effectLst/>
-        </p:spPr>
-      </p:cxnSp>
-      <p:sp>
-        <p:nvSpPr>
-          <p:cNvPr id="32" name="C1-E31 text 30" descr="sci-ppt:o030"/>
-          <p:cNvSpPr txBox="1"/>
-          <p:nvPr/>
-        </p:nvSpPr>
-        <p:spPr>
-          <a:xfrm>
-            <a:off x="5989320" y="1335024"/>
-            <a:ext cx="777240" cy="208407"/>
-          </a:xfrm>
-          <a:prstGeom prst="rect">
-            <a:avLst/>
-          </a:prstGeom>
-          <a:noFill/>
-          <a:effectLst/>
-        </p:spPr>
-        <p:txBody>
-          <a:bodyPr wrap="none" lIns="18288" rIns="18288" tIns="18288" bIns="18288" anchor="t">
-            <a:spAutoFit/>
-          </a:bodyPr>
-          <a:lstStyle/>
-          <a:p>
-            <a:pPr algn="r">
-              <a:spcAft>
-                <a:spcPts val="0"/>
-              </a:spcAft>
-            </a:pPr>
-            <a:r>
-              <a:rPr sz="1050" b="0" i="0">
-                <a:solidFill>
-                  <a:srgbClr val="B4C7D2"/>
-                </a:solidFill>
-                <a:latin typeface="Arial"/>
-              </a:rPr>
-              <a:t>1e+02</a:t>
-            </a:r>
-          </a:p>
-        </p:txBody>
-      </p:sp>
-      <p:sp>
-        <p:nvSpPr>
-          <p:cNvPr id="33" name="C1-E31 text 31" descr="sci-ppt:o031"/>
-          <p:cNvSpPr txBox="1"/>
-          <p:nvPr/>
-        </p:nvSpPr>
-        <p:spPr>
-          <a:xfrm>
-            <a:off x="6858000" y="4992624"/>
-            <a:ext cx="4937760" cy="231648"/>
-          </a:xfrm>
-          <a:prstGeom prst="rect">
-            <a:avLst/>
-          </a:prstGeom>
-          <a:noFill/>
-          <a:effectLst/>
-        </p:spPr>
-        <p:txBody>
-          <a:bodyPr wrap="none" lIns="18288" rIns="18288" tIns="18288" bIns="18288" anchor="t">
-            <a:spAutoFit/>
-          </a:bodyPr>
-          <a:lstStyle/>
-          <a:p>
-            <a:pPr algn="ctr">
-              <a:spcAft>
-                <a:spcPts val="0"/>
-              </a:spcAft>
-            </a:pPr>
-            <a:r>
-              <a:rPr sz="1200" b="0" i="0">
-                <a:solidFill>
-                  <a:srgbClr val="E7F0F3"/>
-                </a:solidFill>
-                <a:latin typeface="Arial"/>
-              </a:rPr>
-              <a:t>communication length Lₑ  (m)</a:t>
-            </a:r>
-          </a:p>
-        </p:txBody>
-      </p:sp>
-      <p:sp>
-        <p:nvSpPr>
-          <p:cNvPr id="34" name="C1-E31 text 32" descr="sci-ppt:o032"/>
-          <p:cNvSpPr txBox="1"/>
-          <p:nvPr/>
-        </p:nvSpPr>
-        <p:spPr>
-          <a:xfrm>
-            <a:off x="6309360" y="1069848"/>
-            <a:ext cx="4937760" cy="231648"/>
-          </a:xfrm>
-          <a:prstGeom prst="rect">
-            <a:avLst/>
-          </a:prstGeom>
-          <a:noFill/>
-          <a:effectLst/>
-        </p:spPr>
-        <p:txBody>
-          <a:bodyPr wrap="none" lIns="18288" rIns="18288" tIns="18288" bIns="18288" anchor="t">
-            <a:spAutoFit/>
-          </a:bodyPr>
-          <a:lstStyle/>
-          <a:p>
-            <a:pPr algn="l">
-              <a:spcAft>
-                <a:spcPts val="0"/>
-              </a:spcAft>
-            </a:pPr>
-            <a:r>
-              <a:rPr sz="1200" b="0" i="0">
-                <a:solidFill>
-                  <a:srgbClr val="E7F0F3"/>
-                </a:solidFill>
-                <a:latin typeface="Arial"/>
-              </a:rPr>
-              <a:t>𝒞ₑ = Lₑ / (c τₑ)</a:t>
-            </a:r>
-          </a:p>
-        </p:txBody>
-      </p:sp>
-      <p:sp>
-        <p:nvSpPr>
-          <p:cNvPr id="35" name="C1-E31 polygon 33" descr="sci-ppt:o033"/>
-          <p:cNvSpPr/>
-          <p:nvPr/>
-        </p:nvSpPr>
-        <p:spPr>
-          <a:xfrm>
-            <a:off x="6858000" y="1562236"/>
-            <a:ext cx="4937760" cy="2468880"/>
-          </a:xfrm>
-          <a:custGeom>
-            <a:avLst/>
-            <a:gdLst/>
-            <a:ahLst/>
-            <a:cxnLst/>
-            <a:rect l="l" t="t" r="r" b="b"/>
-            <a:pathLst>
-              <a:path w="4937760" h="2468880">
-                <a:moveTo>
-                  <a:pt x="0" y="2468880"/>
-                </a:moveTo>
-                <a:lnTo>
-                  <a:pt x="49876" y="2443941"/>
-                </a:lnTo>
-                <a:lnTo>
-                  <a:pt x="99752" y="2419003"/>
-                </a:lnTo>
-                <a:lnTo>
-                  <a:pt x="149629" y="2394065"/>
-                </a:lnTo>
-                <a:lnTo>
-                  <a:pt x="199505" y="2369127"/>
-                </a:lnTo>
-                <a:lnTo>
-                  <a:pt x="249381" y="2344189"/>
-                </a:lnTo>
-                <a:lnTo>
-                  <a:pt x="299258" y="2319250"/>
-                </a:lnTo>
-                <a:lnTo>
-                  <a:pt x="349134" y="2294312"/>
-                </a:lnTo>
-                <a:lnTo>
-                  <a:pt x="399010" y="2269374"/>
-                </a:lnTo>
-                <a:lnTo>
-                  <a:pt x="448887" y="2244436"/>
-                </a:lnTo>
-                <a:lnTo>
-                  <a:pt x="498763" y="2219498"/>
-                </a:lnTo>
-                <a:lnTo>
-                  <a:pt x="548640" y="2194560"/>
-                </a:lnTo>
-                <a:lnTo>
-                  <a:pt x="598516" y="2169621"/>
-                </a:lnTo>
-                <a:lnTo>
-                  <a:pt x="648392" y="2144683"/>
-                </a:lnTo>
-                <a:lnTo>
-                  <a:pt x="698269" y="2119745"/>
-                </a:lnTo>
-                <a:lnTo>
-                  <a:pt x="748145" y="2094807"/>
-                </a:lnTo>
-                <a:lnTo>
-                  <a:pt x="798021" y="2069869"/>
-                </a:lnTo>
-                <a:lnTo>
-                  <a:pt x="847898" y="2044930"/>
-                </a:lnTo>
-                <a:lnTo>
-                  <a:pt x="897774" y="2019992"/>
-                </a:lnTo>
-                <a:lnTo>
-                  <a:pt x="947650" y="1995054"/>
-                </a:lnTo>
-                <a:lnTo>
-                  <a:pt x="997527" y="1970116"/>
-                </a:lnTo>
-                <a:lnTo>
-                  <a:pt x="1047403" y="1945178"/>
-                </a:lnTo>
-                <a:lnTo>
-                  <a:pt x="1097280" y="1920240"/>
-                </a:lnTo>
-                <a:lnTo>
-                  <a:pt x="1147156" y="1895301"/>
-                </a:lnTo>
-                <a:lnTo>
-                  <a:pt x="1197032" y="1870363"/>
-                </a:lnTo>
-                <a:lnTo>
-                  <a:pt x="1246909" y="1845425"/>
-                </a:lnTo>
-                <a:lnTo>
-                  <a:pt x="1296785" y="1820487"/>
-                </a:lnTo>
-                <a:lnTo>
-                  <a:pt x="1346661" y="1795549"/>
-                </a:lnTo>
-                <a:lnTo>
-                  <a:pt x="1396538" y="1770610"/>
-                </a:lnTo>
-                <a:lnTo>
-                  <a:pt x="1446414" y="1745672"/>
-                </a:lnTo>
-                <a:lnTo>
-                  <a:pt x="1496290" y="1720734"/>
-                </a:lnTo>
-                <a:lnTo>
-                  <a:pt x="1546167" y="1695796"/>
-                </a:lnTo>
-                <a:lnTo>
-                  <a:pt x="1596043" y="1670858"/>
-                </a:lnTo>
-                <a:lnTo>
-                  <a:pt x="1645920" y="1645920"/>
-                </a:lnTo>
-                <a:lnTo>
-                  <a:pt x="1695796" y="1620981"/>
-                </a:lnTo>
-                <a:lnTo>
-                  <a:pt x="1745672" y="1596043"/>
-                </a:lnTo>
-                <a:lnTo>
-                  <a:pt x="1795549" y="1571105"/>
-                </a:lnTo>
-                <a:lnTo>
-                  <a:pt x="1845425" y="1546167"/>
-                </a:lnTo>
-                <a:lnTo>
-                  <a:pt x="1895301" y="1521229"/>
-                </a:lnTo>
-                <a:lnTo>
-                  <a:pt x="1945178" y="1496290"/>
-                </a:lnTo>
-                <a:lnTo>
-                  <a:pt x="1995054" y="1471352"/>
-                </a:lnTo>
-                <a:lnTo>
-                  <a:pt x="2044930" y="1446414"/>
-                </a:lnTo>
-                <a:lnTo>
-                  <a:pt x="2094807" y="1421476"/>
-                </a:lnTo>
-                <a:lnTo>
-                  <a:pt x="2144683" y="1396538"/>
-                </a:lnTo>
-                <a:lnTo>
-                  <a:pt x="2194560" y="1371600"/>
-                </a:lnTo>
-                <a:lnTo>
-                  <a:pt x="2244436" y="1346661"/>
-                </a:lnTo>
-                <a:lnTo>
-                  <a:pt x="2294312" y="1321723"/>
-                </a:lnTo>
-                <a:lnTo>
-                  <a:pt x="2344189" y="1296785"/>
-                </a:lnTo>
-                <a:lnTo>
-                  <a:pt x="2394065" y="1271847"/>
-                </a:lnTo>
-                <a:lnTo>
-                  <a:pt x="2443941" y="1246909"/>
-                </a:lnTo>
-                <a:lnTo>
-                  <a:pt x="2493818" y="1221970"/>
-                </a:lnTo>
-                <a:lnTo>
-                  <a:pt x="2543694" y="1197032"/>
-                </a:lnTo>
-                <a:lnTo>
-                  <a:pt x="2593570" y="1172094"/>
-                </a:lnTo>
-                <a:lnTo>
-                  <a:pt x="2643447" y="1147156"/>
-                </a:lnTo>
-                <a:lnTo>
-                  <a:pt x="2693323" y="1122218"/>
-                </a:lnTo>
-                <a:lnTo>
-                  <a:pt x="2743200" y="1097280"/>
-                </a:lnTo>
-                <a:lnTo>
-                  <a:pt x="2793076" y="1072341"/>
-                </a:lnTo>
-                <a:lnTo>
-                  <a:pt x="2842952" y="1047403"/>
-                </a:lnTo>
-                <a:lnTo>
-                  <a:pt x="2892829" y="1022465"/>
-                </a:lnTo>
-                <a:lnTo>
-                  <a:pt x="2942705" y="997527"/>
-                </a:lnTo>
-                <a:lnTo>
-                  <a:pt x="2992581" y="972589"/>
-                </a:lnTo>
-                <a:lnTo>
-                  <a:pt x="3042458" y="947650"/>
-                </a:lnTo>
-                <a:lnTo>
-                  <a:pt x="3092334" y="922712"/>
-                </a:lnTo>
-                <a:lnTo>
-                  <a:pt x="3142210" y="897774"/>
-                </a:lnTo>
-                <a:lnTo>
-                  <a:pt x="3192087" y="872836"/>
-                </a:lnTo>
-                <a:lnTo>
-                  <a:pt x="3241963" y="847898"/>
-                </a:lnTo>
-                <a:lnTo>
-                  <a:pt x="3291840" y="822960"/>
-                </a:lnTo>
-                <a:lnTo>
-                  <a:pt x="3341716" y="798021"/>
-                </a:lnTo>
-                <a:lnTo>
-                  <a:pt x="3391592" y="773083"/>
-                </a:lnTo>
-                <a:lnTo>
-                  <a:pt x="3441469" y="748145"/>
-                </a:lnTo>
-                <a:lnTo>
-                  <a:pt x="3491345" y="723207"/>
-                </a:lnTo>
-                <a:lnTo>
-                  <a:pt x="3541221" y="698269"/>
-                </a:lnTo>
-                <a:lnTo>
-                  <a:pt x="3591098" y="673330"/>
-                </a:lnTo>
-                <a:lnTo>
-                  <a:pt x="3640974" y="648392"/>
-                </a:lnTo>
-                <a:lnTo>
-                  <a:pt x="3690850" y="623454"/>
-                </a:lnTo>
-                <a:lnTo>
-                  <a:pt x="3740727" y="598516"/>
-                </a:lnTo>
-                <a:lnTo>
-                  <a:pt x="3790603" y="573578"/>
-                </a:lnTo>
-                <a:lnTo>
-                  <a:pt x="3840480" y="548640"/>
-                </a:lnTo>
-                <a:lnTo>
-                  <a:pt x="3890356" y="523701"/>
-                </a:lnTo>
-                <a:lnTo>
-                  <a:pt x="3940232" y="498763"/>
-                </a:lnTo>
-                <a:lnTo>
-                  <a:pt x="3990109" y="473825"/>
-                </a:lnTo>
-                <a:lnTo>
-                  <a:pt x="4039985" y="448887"/>
-                </a:lnTo>
-                <a:lnTo>
-                  <a:pt x="4089861" y="423949"/>
-                </a:lnTo>
-                <a:lnTo>
-                  <a:pt x="4139738" y="399010"/>
-                </a:lnTo>
-                <a:lnTo>
-                  <a:pt x="4189614" y="374072"/>
-                </a:lnTo>
-                <a:lnTo>
-                  <a:pt x="4239490" y="349134"/>
-                </a:lnTo>
-                <a:lnTo>
-                  <a:pt x="4289367" y="324196"/>
-                </a:lnTo>
-                <a:lnTo>
-                  <a:pt x="4339243" y="299258"/>
-                </a:lnTo>
-                <a:lnTo>
-                  <a:pt x="4389120" y="274320"/>
-                </a:lnTo>
-                <a:lnTo>
-                  <a:pt x="4438996" y="249381"/>
-                </a:lnTo>
-                <a:lnTo>
-                  <a:pt x="4488872" y="224443"/>
-                </a:lnTo>
-                <a:lnTo>
-                  <a:pt x="4538749" y="199505"/>
-                </a:lnTo>
-                <a:lnTo>
-                  <a:pt x="4588625" y="174567"/>
-                </a:lnTo>
-                <a:lnTo>
-                  <a:pt x="4638501" y="149629"/>
-                </a:lnTo>
-                <a:lnTo>
-                  <a:pt x="4688378" y="124690"/>
-                </a:lnTo>
-                <a:lnTo>
-                  <a:pt x="4738254" y="99752"/>
-                </a:lnTo>
-                <a:lnTo>
-                  <a:pt x="4788130" y="74814"/>
-                </a:lnTo>
-                <a:lnTo>
-                  <a:pt x="4838007" y="49876"/>
-                </a:lnTo>
-                <a:lnTo>
-                  <a:pt x="4887883" y="24938"/>
-                </a:lnTo>
-                <a:lnTo>
-                  <a:pt x="4937760" y="0"/>
-                </a:lnTo>
-              </a:path>
-            </a:pathLst>
-          </a:custGeom>
-          <a:noFill/>
-          <a:ln w="38100">
-            <a:solidFill>
-              <a:srgbClr val="F28BA0"/>
-            </a:solidFill>
-          </a:ln>
-          <a:effectLst/>
-        </p:spPr>
-        <p:txBody>
-          <a:bodyPr rtlCol="0" anchor="ctr"/>
-          <a:lstStyle/>
-          <a:p>
-            <a:pPr algn="ctr"/>
-          </a:p>
-        </p:txBody>
-      </p:sp>
-      <p:sp>
-        <p:nvSpPr>
-          <p:cNvPr id="36" name="C1-E31 polygon 34" descr="sci-ppt:o034"/>
-          <p:cNvSpPr/>
-          <p:nvPr/>
-        </p:nvSpPr>
-        <p:spPr>
-          <a:xfrm>
-            <a:off x="8803178" y="3208156"/>
-            <a:ext cx="2992582" cy="1496290"/>
-          </a:xfrm>
-          <a:custGeom>
-            <a:avLst/>
-            <a:gdLst/>
-            <a:ahLst/>
-            <a:cxnLst/>
-            <a:rect l="l" t="t" r="r" b="b"/>
-            <a:pathLst>
-              <a:path w="2992582" h="1496290">
-                <a:moveTo>
-                  <a:pt x="0" y="1496290"/>
-                </a:moveTo>
-                <a:lnTo>
-                  <a:pt x="49876" y="1471352"/>
-                </a:lnTo>
-                <a:lnTo>
-                  <a:pt x="99752" y="1446414"/>
-                </a:lnTo>
-                <a:lnTo>
-                  <a:pt x="149629" y="1421476"/>
-                </a:lnTo>
-                <a:lnTo>
-                  <a:pt x="199505" y="1396538"/>
-                </a:lnTo>
-                <a:lnTo>
-                  <a:pt x="249382" y="1371600"/>
-                </a:lnTo>
-                <a:lnTo>
-                  <a:pt x="299258" y="1346661"/>
-                </a:lnTo>
-                <a:lnTo>
-                  <a:pt x="349134" y="1321723"/>
-                </a:lnTo>
-                <a:lnTo>
-                  <a:pt x="399011" y="1296785"/>
-                </a:lnTo>
-                <a:lnTo>
-                  <a:pt x="448887" y="1271847"/>
-                </a:lnTo>
-                <a:lnTo>
-                  <a:pt x="498763" y="1246909"/>
-                </a:lnTo>
-                <a:lnTo>
-                  <a:pt x="548640" y="1221970"/>
-                </a:lnTo>
-                <a:lnTo>
-                  <a:pt x="598516" y="1197032"/>
-                </a:lnTo>
-                <a:lnTo>
-                  <a:pt x="648392" y="1172094"/>
-                </a:lnTo>
-                <a:lnTo>
-                  <a:pt x="698269" y="1147156"/>
-                </a:lnTo>
-                <a:lnTo>
-                  <a:pt x="748145" y="1122218"/>
-                </a:lnTo>
-                <a:lnTo>
-                  <a:pt x="798022" y="1097280"/>
-                </a:lnTo>
-                <a:lnTo>
-                  <a:pt x="847898" y="1072341"/>
-                </a:lnTo>
-                <a:lnTo>
-                  <a:pt x="897774" y="1047403"/>
-                </a:lnTo>
-                <a:lnTo>
-                  <a:pt x="947651" y="1022465"/>
-                </a:lnTo>
-                <a:lnTo>
-                  <a:pt x="997527" y="997527"/>
-                </a:lnTo>
-                <a:lnTo>
-                  <a:pt x="1047403" y="972589"/>
-                </a:lnTo>
-                <a:lnTo>
-                  <a:pt x="1097280" y="947650"/>
-                </a:lnTo>
-                <a:lnTo>
-                  <a:pt x="1147156" y="922712"/>
-                </a:lnTo>
-                <a:lnTo>
-                  <a:pt x="1197032" y="897774"/>
-                </a:lnTo>
-                <a:lnTo>
-                  <a:pt x="1246909" y="872836"/>
-                </a:lnTo>
-                <a:lnTo>
-                  <a:pt x="1296785" y="847898"/>
-                </a:lnTo>
-                <a:lnTo>
-                  <a:pt x="1346662" y="822960"/>
-                </a:lnTo>
-                <a:lnTo>
-                  <a:pt x="1396538" y="798021"/>
-                </a:lnTo>
-                <a:lnTo>
-                  <a:pt x="1446414" y="773083"/>
-                </a:lnTo>
-                <a:lnTo>
-                  <a:pt x="1496291" y="748145"/>
-                </a:lnTo>
-                <a:lnTo>
-                  <a:pt x="1546167" y="723207"/>
-                </a:lnTo>
-                <a:lnTo>
-                  <a:pt x="1596043" y="698269"/>
-                </a:lnTo>
-                <a:lnTo>
-                  <a:pt x="1645920" y="673330"/>
-                </a:lnTo>
-                <a:lnTo>
-                  <a:pt x="1695796" y="648392"/>
-                </a:lnTo>
-                <a:lnTo>
-                  <a:pt x="1745672" y="623454"/>
-                </a:lnTo>
-                <a:lnTo>
-                  <a:pt x="1795549" y="598516"/>
-                </a:lnTo>
-                <a:lnTo>
-                  <a:pt x="1845425" y="573578"/>
-                </a:lnTo>
-                <a:lnTo>
-                  <a:pt x="1895302" y="548640"/>
-                </a:lnTo>
-                <a:lnTo>
-                  <a:pt x="1945178" y="523701"/>
-                </a:lnTo>
-                <a:lnTo>
-                  <a:pt x="1995054" y="498763"/>
-                </a:lnTo>
-                <a:lnTo>
-                  <a:pt x="2044931" y="473825"/>
-                </a:lnTo>
-                <a:lnTo>
-                  <a:pt x="2094807" y="448887"/>
-                </a:lnTo>
-                <a:lnTo>
-                  <a:pt x="2144683" y="423949"/>
-                </a:lnTo>
-                <a:lnTo>
-                  <a:pt x="2194560" y="399010"/>
-                </a:lnTo>
-                <a:lnTo>
-                  <a:pt x="2244436" y="374072"/>
-                </a:lnTo>
-                <a:lnTo>
-                  <a:pt x="2294312" y="349134"/>
-                </a:lnTo>
-                <a:lnTo>
-                  <a:pt x="2344189" y="324196"/>
-                </a:lnTo>
-                <a:lnTo>
-                  <a:pt x="2394065" y="299258"/>
-                </a:lnTo>
-                <a:lnTo>
-                  <a:pt x="2443942" y="274320"/>
-                </a:lnTo>
-                <a:lnTo>
-                  <a:pt x="2493818" y="249381"/>
-                </a:lnTo>
-                <a:lnTo>
-                  <a:pt x="2543694" y="224443"/>
-                </a:lnTo>
-                <a:lnTo>
-                  <a:pt x="2593571" y="199505"/>
-                </a:lnTo>
-                <a:lnTo>
-                  <a:pt x="2643447" y="174567"/>
-                </a:lnTo>
-                <a:lnTo>
-                  <a:pt x="2693323" y="149629"/>
-                </a:lnTo>
-                <a:lnTo>
-                  <a:pt x="2743200" y="124690"/>
-                </a:lnTo>
-                <a:lnTo>
-                  <a:pt x="2793076" y="99752"/>
-                </a:lnTo>
-                <a:lnTo>
-                  <a:pt x="2842952" y="74814"/>
-                </a:lnTo>
-                <a:lnTo>
-                  <a:pt x="2892829" y="49876"/>
-                </a:lnTo>
-                <a:lnTo>
-                  <a:pt x="2942705" y="24938"/>
-                </a:lnTo>
-                <a:lnTo>
-                  <a:pt x="2992582" y="0"/>
-                </a:lnTo>
-              </a:path>
-            </a:pathLst>
-          </a:custGeom>
-          <a:noFill/>
-          <a:ln w="38100">
-            <a:solidFill>
-              <a:srgbClr val="8EDBD4"/>
-            </a:solidFill>
-          </a:ln>
-          <a:effectLst/>
-        </p:spPr>
-        <p:txBody>
-          <a:bodyPr rtlCol="0" anchor="ctr"/>
-          <a:lstStyle/>
-          <a:p>
-            <a:pPr algn="ctr"/>
-          </a:p>
-        </p:txBody>
-      </p:sp>
-      <p:cxnSp>
-        <p:nvCxnSpPr>
-          <p:cNvPr id="37" name="C1-E31 line 35" descr="sci-ppt:o035"/>
-          <p:cNvCxnSpPr/>
-          <p:nvPr/>
-        </p:nvCxnSpPr>
-        <p:spPr>
-          <a:xfrm>
-            <a:off x="6858000" y="3063240"/>
-            <a:ext cx="4937760" cy="0"/>
-          </a:xfrm>
-          <a:prstGeom prst="line">
-            <a:avLst/>
-          </a:prstGeom>
-          <a:ln w="16510">
-            <a:solidFill>
-              <a:srgbClr val="F2B880"/>
-            </a:solidFill>
-            <a:prstDash val="dash"/>
-          </a:ln>
-          <a:effectLst/>
-        </p:spPr>
-      </p:cxnSp>
-      <p:sp>
-        <p:nvSpPr>
-          <p:cNvPr id="38" name="C1-E31 text 36" descr="sci-ppt:o036"/>
-          <p:cNvSpPr txBox="1"/>
-          <p:nvPr/>
-        </p:nvSpPr>
-        <p:spPr>
-          <a:xfrm>
-            <a:off x="7220984" y="2788920"/>
-            <a:ext cx="1097280" cy="231648"/>
-          </a:xfrm>
-          <a:prstGeom prst="rect">
-            <a:avLst/>
-          </a:prstGeom>
-          <a:noFill/>
-          <a:effectLst/>
-        </p:spPr>
-        <p:txBody>
-          <a:bodyPr wrap="none" lIns="18288" rIns="18288" tIns="18288" bIns="18288" anchor="t">
-            <a:spAutoFit/>
-          </a:bodyPr>
-          <a:lstStyle/>
-          <a:p>
-            <a:pPr algn="l">
-              <a:spcAft>
-                <a:spcPts val="0"/>
-              </a:spcAft>
-            </a:pPr>
-            <a:r>
-              <a:rPr sz="1200" b="0" i="0">
-                <a:solidFill>
-                  <a:srgbClr val="F2B880"/>
-                </a:solidFill>
-                <a:latin typeface="Arial"/>
-              </a:rPr>
-              <a:t>𝒞ₑ = 1</a:t>
-            </a:r>
-          </a:p>
-        </p:txBody>
-      </p:sp>
-      <p:sp>
-        <p:nvSpPr>
-          <p:cNvPr id="39" name="C1-E31 text 37" descr="sci-ppt:o037"/>
-          <p:cNvSpPr txBox="1"/>
-          <p:nvPr/>
-        </p:nvSpPr>
-        <p:spPr>
-          <a:xfrm>
-            <a:off x="9072543" y="1901104"/>
-            <a:ext cx="1645920" cy="231648"/>
-          </a:xfrm>
-          <a:prstGeom prst="rect">
-            <a:avLst/>
-          </a:prstGeom>
-          <a:noFill/>
-          <a:effectLst/>
-        </p:spPr>
-        <p:txBody>
-          <a:bodyPr wrap="none" lIns="18288" rIns="18288" tIns="18288" bIns="18288" anchor="t">
-            <a:spAutoFit/>
-          </a:bodyPr>
-          <a:lstStyle/>
-          <a:p>
-            <a:pPr algn="l">
-              <a:spcAft>
-                <a:spcPts val="0"/>
-              </a:spcAft>
-            </a:pPr>
-            <a:r>
-              <a:rPr sz="1200" b="0" i="0">
-                <a:solidFill>
-                  <a:srgbClr val="F28BA0"/>
-                </a:solidFill>
-                <a:latin typeface="Arial"/>
-              </a:rPr>
-              <a:t>τₑ = 0.1 µs</a:t>
-            </a:r>
-          </a:p>
-        </p:txBody>
-      </p:sp>
-      <p:sp>
-        <p:nvSpPr>
-          <p:cNvPr id="40" name="C1-E31 text 38" descr="sci-ppt:o038"/>
-          <p:cNvSpPr txBox="1"/>
-          <p:nvPr/>
-        </p:nvSpPr>
-        <p:spPr>
-          <a:xfrm>
-            <a:off x="10353317" y="3402108"/>
-            <a:ext cx="1645920" cy="231648"/>
-          </a:xfrm>
-          <a:prstGeom prst="rect">
-            <a:avLst/>
-          </a:prstGeom>
-          <a:noFill/>
-          <a:effectLst/>
-        </p:spPr>
-        <p:txBody>
-          <a:bodyPr wrap="none" lIns="18288" rIns="18288" tIns="18288" bIns="18288" anchor="t">
-            <a:spAutoFit/>
-          </a:bodyPr>
-          <a:lstStyle/>
-          <a:p>
-            <a:pPr algn="l">
-              <a:spcAft>
-                <a:spcPts val="0"/>
-              </a:spcAft>
-            </a:pPr>
-            <a:r>
-              <a:rPr sz="1200" b="0" i="0">
-                <a:solidFill>
-                  <a:srgbClr val="8EDBD4"/>
-                </a:solidFill>
-                <a:latin typeface="Arial"/>
-              </a:rPr>
-              <a:t>τₑ = 10 µs</a:t>
-            </a:r>
-          </a:p>
-        </p:txBody>
-      </p:sp>
-      <p:sp>
-        <p:nvSpPr>
-          <p:cNvPr id="41" name="C1-E31 text 39" descr="sci-ppt:o039"/>
-          <p:cNvSpPr txBox="1"/>
-          <p:nvPr/>
-        </p:nvSpPr>
-        <p:spPr>
-          <a:xfrm>
-            <a:off x="6858000" y="5212080"/>
-            <a:ext cx="4937760" cy="239395"/>
-          </a:xfrm>
-          <a:prstGeom prst="rect">
-            <a:avLst/>
-          </a:prstGeom>
-          <a:noFill/>
-          <a:effectLst/>
-        </p:spPr>
-        <p:txBody>
-          <a:bodyPr wrap="none" lIns="18288" rIns="18288" tIns="18288" bIns="18288" anchor="t">
-            <a:spAutoFit/>
-          </a:bodyPr>
-          <a:lstStyle/>
-          <a:p>
-            <a:pPr algn="l">
-              <a:spcAft>
-                <a:spcPts val="0"/>
-              </a:spcAft>
-            </a:pPr>
-            <a:r>
-              <a:rPr sz="1250" b="1" i="0">
-                <a:solidFill>
-                  <a:srgbClr val="E7F0F3"/>
-                </a:solidFill>
-                <a:latin typeface="Arial"/>
-              </a:rPr>
-              <a:t>M_w = |Ṙ|/c  and  𝒞ₑ = Lₑ/(cτₑ)  test different things.</a:t>
-            </a:r>
-          </a:p>
-        </p:txBody>
-      </p:sp>
-      <p:sp>
-        <p:nvSpPr>
-          <p:cNvPr id="42" name="C1-E31 text 40" descr="sci-ppt:o040"/>
-          <p:cNvSpPr txBox="1"/>
-          <p:nvPr/>
-        </p:nvSpPr>
-        <p:spPr>
-          <a:xfrm>
-            <a:off x="457200" y="5669280"/>
-            <a:ext cx="11338560" cy="247142"/>
-          </a:xfrm>
-          <a:prstGeom prst="rect">
-            <a:avLst/>
-          </a:prstGeom>
-          <a:noFill/>
-          <a:effectLst/>
-        </p:spPr>
-        <p:txBody>
-          <a:bodyPr wrap="none" lIns="18288" rIns="18288" tIns="18288" bIns="18288" anchor="t">
-            <a:spAutoFit/>
-          </a:bodyPr>
-          <a:lstStyle/>
-          <a:p>
-            <a:pPr algn="l">
-              <a:spcAft>
-                <a:spcPts val="0"/>
-              </a:spcAft>
-            </a:pPr>
-            <a:r>
-              <a:rPr sz="1300" b="0" i="0">
-                <a:solidFill>
-                  <a:srgbClr val="F2B880"/>
-                </a:solidFill>
-                <a:latin typeface="Arial"/>
-              </a:rPr>
-              <a:t>A pulse can need compressibility even when the wall is slow: 𝒞ₑ ≳ 1 means pressure cannot equalise during the rise.</a:t>
-            </a:r>
-          </a:p>
-        </p:txBody>
-      </p:sp>
-      <p:sp>
-        <p:nvSpPr>
-          <p:cNvPr id="43" name="C1-E31 text 41" descr="sci-ppt:o041"/>
+              <a:t>Every term of the radius equation is a pressure (Pa); every term of the composition is a partial pressure.</a:t>
+            </a:r>
+          </a:p>
+        </p:txBody>
+      </p:sp>
+      <p:sp>
+        <p:nvSpPr>
+          <p:cNvPr id="23" name="C1-E31 text 21" descr="sci-ppt:o021"/>
           <p:cNvSpPr txBox="1"/>
           <p:nvPr/>
         </p:nvSpPr>
@@ -5423,7 +3995,7 @@
                 </a:solidFill>
                 <a:latin typeface="Arial"/>
               </a:rPr>
-              <a:t>c = 1500 m/s; curves from the definition 𝒞ₑ = Lₑ/(c τₑ) of Eq. C1-E31.</a:t>
+              <a:t>Summary of Eqs. C1-E07 and C1-E08.</a:t>
             </a:r>
           </a:p>
         </p:txBody>
